--- a/reports/FORESIGHT_REPORT.pptx
+++ b/reports/FORESIGHT_REPORT.pptx
@@ -15,6 +15,14 @@
     <p:sldId id="263" r:id="rId14"/>
     <p:sldId id="264" r:id="rId15"/>
     <p:sldId id="265" r:id="rId16"/>
+    <p:sldId id="266" r:id="rId17"/>
+    <p:sldId id="267" r:id="rId18"/>
+    <p:sldId id="268" r:id="rId19"/>
+    <p:sldId id="269" r:id="rId20"/>
+    <p:sldId id="270" r:id="rId21"/>
+    <p:sldId id="271" r:id="rId22"/>
+    <p:sldId id="272" r:id="rId23"/>
+    <p:sldId id="273" r:id="rId24"/>
   </p:sldIdLst>
   <p:sldSz cx="12191695" cy="6858000" type="screen4x3"/>
   <p:notesSz cx="6858000" cy="9144000"/>
@@ -4767,6 +4775,6100 @@
 </p:sld>
 </file>
 
+<file path=ppt/slides/slide11.xml><?xml version="1.0" encoding="utf-8"?>
+<p:sld xmlns:a="http://schemas.openxmlformats.org/drawingml/2006/main" xmlns:p="http://schemas.openxmlformats.org/presentationml/2006/main" xmlns:r="http://schemas.openxmlformats.org/officeDocument/2006/relationships">
+  <p:cSld>
+    <p:bg>
+      <p:bgPr>
+        <a:solidFill>
+          <a:srgbClr val="0E1D35"/>
+        </a:solidFill>
+        <a:effectLst/>
+      </p:bgPr>
+    </p:bg>
+    <p:spTree>
+      <p:nvGrpSpPr>
+        <p:cNvPr id="1" name=""/>
+        <p:cNvGrpSpPr/>
+        <p:nvPr/>
+      </p:nvGrpSpPr>
+      <p:grpSpPr/>
+      <p:sp>
+        <p:nvSpPr>
+          <p:cNvPr id="2" name="TextBox 1"/>
+          <p:cNvSpPr txBox="1"/>
+          <p:nvPr/>
+        </p:nvSpPr>
+        <p:spPr>
+          <a:xfrm>
+            <a:off x="640080" y="320040"/>
+            <a:ext cx="10972800" cy="365760"/>
+          </a:xfrm>
+          <a:prstGeom prst="rect">
+            <a:avLst/>
+          </a:prstGeom>
+          <a:noFill/>
+        </p:spPr>
+        <p:txBody>
+          <a:bodyPr wrap="square">
+            <a:spAutoFit/>
+          </a:bodyPr>
+          <a:lstStyle/>
+          <a:p>
+            <a:pPr algn="l"/>
+            <a:r>
+              <a:rPr sz="2400" b="1">
+                <a:solidFill>
+                  <a:srgbClr val="F4F7FC"/>
+                </a:solidFill>
+                <a:latin typeface="Aptos"/>
+              </a:rPr>
+              <a:t>Dashboard Overview &amp; User Workflow</a:t>
+            </a:r>
+          </a:p>
+        </p:txBody>
+      </p:sp>
+      <p:sp>
+        <p:nvSpPr>
+          <p:cNvPr id="3" name="TextBox 2"/>
+          <p:cNvSpPr txBox="1"/>
+          <p:nvPr/>
+        </p:nvSpPr>
+        <p:spPr>
+          <a:xfrm>
+            <a:off x="658368" y="749808"/>
+            <a:ext cx="10972800" cy="274320"/>
+          </a:xfrm>
+          <a:prstGeom prst="rect">
+            <a:avLst/>
+          </a:prstGeom>
+          <a:noFill/>
+        </p:spPr>
+        <p:txBody>
+          <a:bodyPr wrap="square">
+            <a:spAutoFit/>
+          </a:bodyPr>
+          <a:lstStyle/>
+          <a:p>
+            <a:pPr algn="l"/>
+            <a:r>
+              <a:rPr sz="1100" b="0">
+                <a:solidFill>
+                  <a:srgbClr val="B5C4D8"/>
+                </a:solidFill>
+                <a:latin typeface="Aptos"/>
+              </a:rPr>
+              <a:t>Interactive workflow: upload your own compatible CSV data and receive dataset-specific dashboard results.</a:t>
+            </a:r>
+          </a:p>
+        </p:txBody>
+      </p:sp>
+      <p:sp>
+        <p:nvSpPr>
+          <p:cNvPr id="4" name="Rectangle 3"/>
+          <p:cNvSpPr/>
+          <p:nvPr/>
+        </p:nvSpPr>
+        <p:spPr>
+          <a:xfrm>
+            <a:off x="658368" y="1078992"/>
+            <a:ext cx="1188720" cy="50292"/>
+          </a:xfrm>
+          <a:prstGeom prst="rect">
+            <a:avLst/>
+          </a:prstGeom>
+          <a:solidFill>
+            <a:srgbClr val="2CBEC9"/>
+          </a:solidFill>
+          <a:ln>
+            <a:noFill/>
+          </a:ln>
+        </p:spPr>
+        <p:style>
+          <a:lnRef idx="1">
+            <a:schemeClr val="accent1"/>
+          </a:lnRef>
+          <a:fillRef idx="3">
+            <a:schemeClr val="accent1"/>
+          </a:fillRef>
+          <a:effectRef idx="2">
+            <a:schemeClr val="accent1"/>
+          </a:effectRef>
+          <a:fontRef idx="minor">
+            <a:schemeClr val="lt1"/>
+          </a:fontRef>
+        </p:style>
+        <p:txBody>
+          <a:bodyPr rtlCol="0" anchor="ctr"/>
+          <a:lstStyle/>
+          <a:p>
+            <a:pPr algn="ctr"/>
+          </a:p>
+        </p:txBody>
+      </p:sp>
+      <p:sp>
+        <p:nvSpPr>
+          <p:cNvPr id="5" name="Rounded Rectangle 4"/>
+          <p:cNvSpPr/>
+          <p:nvPr/>
+        </p:nvSpPr>
+        <p:spPr>
+          <a:xfrm>
+            <a:off x="640080" y="1417320"/>
+            <a:ext cx="3474720" cy="1920240"/>
+          </a:xfrm>
+          <a:prstGeom prst="roundRect">
+            <a:avLst/>
+          </a:prstGeom>
+          <a:solidFill>
+            <a:srgbClr val="1E3454"/>
+          </a:solidFill>
+          <a:ln>
+            <a:solidFill>
+              <a:srgbClr val="1E3454"/>
+            </a:solidFill>
+          </a:ln>
+        </p:spPr>
+        <p:style>
+          <a:lnRef idx="1">
+            <a:schemeClr val="accent1"/>
+          </a:lnRef>
+          <a:fillRef idx="3">
+            <a:schemeClr val="accent1"/>
+          </a:fillRef>
+          <a:effectRef idx="2">
+            <a:schemeClr val="accent1"/>
+          </a:effectRef>
+          <a:fontRef idx="minor">
+            <a:schemeClr val="lt1"/>
+          </a:fontRef>
+        </p:style>
+        <p:txBody>
+          <a:bodyPr rtlCol="0" anchor="ctr"/>
+          <a:lstStyle/>
+          <a:p>
+            <a:pPr algn="ctr"/>
+          </a:p>
+        </p:txBody>
+      </p:sp>
+      <p:sp>
+        <p:nvSpPr>
+          <p:cNvPr id="6" name="Rectangle 5"/>
+          <p:cNvSpPr/>
+          <p:nvPr/>
+        </p:nvSpPr>
+        <p:spPr>
+          <a:xfrm>
+            <a:off x="640080" y="1417320"/>
+            <a:ext cx="73152" cy="1920240"/>
+          </a:xfrm>
+          <a:prstGeom prst="rect">
+            <a:avLst/>
+          </a:prstGeom>
+          <a:solidFill>
+            <a:srgbClr val="2CBEC9"/>
+          </a:solidFill>
+          <a:ln>
+            <a:noFill/>
+          </a:ln>
+        </p:spPr>
+        <p:style>
+          <a:lnRef idx="1">
+            <a:schemeClr val="accent1"/>
+          </a:lnRef>
+          <a:fillRef idx="3">
+            <a:schemeClr val="accent1"/>
+          </a:fillRef>
+          <a:effectRef idx="2">
+            <a:schemeClr val="accent1"/>
+          </a:effectRef>
+          <a:fontRef idx="minor">
+            <a:schemeClr val="lt1"/>
+          </a:fontRef>
+        </p:style>
+        <p:txBody>
+          <a:bodyPr rtlCol="0" anchor="ctr"/>
+          <a:lstStyle/>
+          <a:p>
+            <a:pPr algn="ctr"/>
+          </a:p>
+        </p:txBody>
+      </p:sp>
+      <p:sp>
+        <p:nvSpPr>
+          <p:cNvPr id="7" name="TextBox 6"/>
+          <p:cNvSpPr txBox="1"/>
+          <p:nvPr/>
+        </p:nvSpPr>
+        <p:spPr>
+          <a:xfrm>
+            <a:off x="841247" y="1581912"/>
+            <a:ext cx="3154679" cy="256032"/>
+          </a:xfrm>
+          <a:prstGeom prst="rect">
+            <a:avLst/>
+          </a:prstGeom>
+          <a:noFill/>
+        </p:spPr>
+        <p:txBody>
+          <a:bodyPr wrap="square">
+            <a:spAutoFit/>
+          </a:bodyPr>
+          <a:lstStyle/>
+          <a:p>
+            <a:pPr algn="l"/>
+            <a:r>
+              <a:rPr sz="1300" b="1">
+                <a:solidFill>
+                  <a:srgbClr val="F4F7FC"/>
+                </a:solidFill>
+                <a:latin typeface="Aptos"/>
+              </a:rPr>
+              <a:t>1. Upload Data</a:t>
+            </a:r>
+          </a:p>
+        </p:txBody>
+      </p:sp>
+      <p:sp>
+        <p:nvSpPr>
+          <p:cNvPr id="8" name="TextBox 7"/>
+          <p:cNvSpPr txBox="1"/>
+          <p:nvPr/>
+        </p:nvSpPr>
+        <p:spPr>
+          <a:xfrm>
+            <a:off x="841247" y="1920240"/>
+            <a:ext cx="3154679" cy="1298448"/>
+          </a:xfrm>
+          <a:prstGeom prst="rect">
+            <a:avLst/>
+          </a:prstGeom>
+          <a:noFill/>
+        </p:spPr>
+        <p:txBody>
+          <a:bodyPr wrap="square">
+            <a:spAutoFit/>
+          </a:bodyPr>
+          <a:lstStyle/>
+          <a:p>
+            <a:pPr algn="l"/>
+            <a:r>
+              <a:rPr sz="1150" b="0">
+                <a:solidFill>
+                  <a:srgbClr val="B5C4D8"/>
+                </a:solidFill>
+                <a:latin typeface="Aptos"/>
+              </a:rPr>
+              <a:t>• Upload one or multiple CSV files
+• Sales, inventory, SKU and calendar data
+• Sidebar file guidance</a:t>
+            </a:r>
+          </a:p>
+        </p:txBody>
+      </p:sp>
+      <p:sp>
+        <p:nvSpPr>
+          <p:cNvPr id="9" name="Rounded Rectangle 8"/>
+          <p:cNvSpPr/>
+          <p:nvPr/>
+        </p:nvSpPr>
+        <p:spPr>
+          <a:xfrm>
+            <a:off x="4343400" y="1417320"/>
+            <a:ext cx="3474720" cy="1920240"/>
+          </a:xfrm>
+          <a:prstGeom prst="roundRect">
+            <a:avLst/>
+          </a:prstGeom>
+          <a:solidFill>
+            <a:srgbClr val="1E3454"/>
+          </a:solidFill>
+          <a:ln>
+            <a:solidFill>
+              <a:srgbClr val="1E3454"/>
+            </a:solidFill>
+          </a:ln>
+        </p:spPr>
+        <p:style>
+          <a:lnRef idx="1">
+            <a:schemeClr val="accent1"/>
+          </a:lnRef>
+          <a:fillRef idx="3">
+            <a:schemeClr val="accent1"/>
+          </a:fillRef>
+          <a:effectRef idx="2">
+            <a:schemeClr val="accent1"/>
+          </a:effectRef>
+          <a:fontRef idx="minor">
+            <a:schemeClr val="lt1"/>
+          </a:fontRef>
+        </p:style>
+        <p:txBody>
+          <a:bodyPr rtlCol="0" anchor="ctr"/>
+          <a:lstStyle/>
+          <a:p>
+            <a:pPr algn="ctr"/>
+          </a:p>
+        </p:txBody>
+      </p:sp>
+      <p:sp>
+        <p:nvSpPr>
+          <p:cNvPr id="10" name="Rectangle 9"/>
+          <p:cNvSpPr/>
+          <p:nvPr/>
+        </p:nvSpPr>
+        <p:spPr>
+          <a:xfrm>
+            <a:off x="4343400" y="1417320"/>
+            <a:ext cx="73152" cy="1920240"/>
+          </a:xfrm>
+          <a:prstGeom prst="rect">
+            <a:avLst/>
+          </a:prstGeom>
+          <a:solidFill>
+            <a:srgbClr val="2B70B8"/>
+          </a:solidFill>
+          <a:ln>
+            <a:noFill/>
+          </a:ln>
+        </p:spPr>
+        <p:style>
+          <a:lnRef idx="1">
+            <a:schemeClr val="accent1"/>
+          </a:lnRef>
+          <a:fillRef idx="3">
+            <a:schemeClr val="accent1"/>
+          </a:fillRef>
+          <a:effectRef idx="2">
+            <a:schemeClr val="accent1"/>
+          </a:effectRef>
+          <a:fontRef idx="minor">
+            <a:schemeClr val="lt1"/>
+          </a:fontRef>
+        </p:style>
+        <p:txBody>
+          <a:bodyPr rtlCol="0" anchor="ctr"/>
+          <a:lstStyle/>
+          <a:p>
+            <a:pPr algn="ctr"/>
+          </a:p>
+        </p:txBody>
+      </p:sp>
+      <p:sp>
+        <p:nvSpPr>
+          <p:cNvPr id="11" name="TextBox 10"/>
+          <p:cNvSpPr txBox="1"/>
+          <p:nvPr/>
+        </p:nvSpPr>
+        <p:spPr>
+          <a:xfrm>
+            <a:off x="4544568" y="1581912"/>
+            <a:ext cx="3154679" cy="256032"/>
+          </a:xfrm>
+          <a:prstGeom prst="rect">
+            <a:avLst/>
+          </a:prstGeom>
+          <a:noFill/>
+        </p:spPr>
+        <p:txBody>
+          <a:bodyPr wrap="square">
+            <a:spAutoFit/>
+          </a:bodyPr>
+          <a:lstStyle/>
+          <a:p>
+            <a:pPr algn="l"/>
+            <a:r>
+              <a:rPr sz="1300" b="1">
+                <a:solidFill>
+                  <a:srgbClr val="F4F7FC"/>
+                </a:solidFill>
+                <a:latin typeface="Aptos"/>
+              </a:rPr>
+              <a:t>2. Explore Data</a:t>
+            </a:r>
+          </a:p>
+        </p:txBody>
+      </p:sp>
+      <p:sp>
+        <p:nvSpPr>
+          <p:cNvPr id="12" name="TextBox 11"/>
+          <p:cNvSpPr txBox="1"/>
+          <p:nvPr/>
+        </p:nvSpPr>
+        <p:spPr>
+          <a:xfrm>
+            <a:off x="4544568" y="1920240"/>
+            <a:ext cx="3154679" cy="1298448"/>
+          </a:xfrm>
+          <a:prstGeom prst="rect">
+            <a:avLst/>
+          </a:prstGeom>
+          <a:noFill/>
+        </p:spPr>
+        <p:txBody>
+          <a:bodyPr wrap="square">
+            <a:spAutoFit/>
+          </a:bodyPr>
+          <a:lstStyle/>
+          <a:p>
+            <a:pPr algn="l"/>
+            <a:r>
+              <a:rPr sz="1150" b="0">
+                <a:solidFill>
+                  <a:srgbClr val="B5C4D8"/>
+                </a:solidFill>
+                <a:latin typeface="Aptos"/>
+              </a:rPr>
+              <a:t>• Uploaded data preview
+• Combined data and standardized columns
+• SKU mapping and consistency checks</a:t>
+            </a:r>
+          </a:p>
+        </p:txBody>
+      </p:sp>
+      <p:sp>
+        <p:nvSpPr>
+          <p:cNvPr id="13" name="Rounded Rectangle 12"/>
+          <p:cNvSpPr/>
+          <p:nvPr/>
+        </p:nvSpPr>
+        <p:spPr>
+          <a:xfrm>
+            <a:off x="8046720" y="1417320"/>
+            <a:ext cx="3474720" cy="1920240"/>
+          </a:xfrm>
+          <a:prstGeom prst="roundRect">
+            <a:avLst/>
+          </a:prstGeom>
+          <a:solidFill>
+            <a:srgbClr val="1E3454"/>
+          </a:solidFill>
+          <a:ln>
+            <a:solidFill>
+              <a:srgbClr val="1E3454"/>
+            </a:solidFill>
+          </a:ln>
+        </p:spPr>
+        <p:style>
+          <a:lnRef idx="1">
+            <a:schemeClr val="accent1"/>
+          </a:lnRef>
+          <a:fillRef idx="3">
+            <a:schemeClr val="accent1"/>
+          </a:fillRef>
+          <a:effectRef idx="2">
+            <a:schemeClr val="accent1"/>
+          </a:effectRef>
+          <a:fontRef idx="minor">
+            <a:schemeClr val="lt1"/>
+          </a:fontRef>
+        </p:style>
+        <p:txBody>
+          <a:bodyPr rtlCol="0" anchor="ctr"/>
+          <a:lstStyle/>
+          <a:p>
+            <a:pPr algn="ctr"/>
+          </a:p>
+        </p:txBody>
+      </p:sp>
+      <p:sp>
+        <p:nvSpPr>
+          <p:cNvPr id="14" name="Rectangle 13"/>
+          <p:cNvSpPr/>
+          <p:nvPr/>
+        </p:nvSpPr>
+        <p:spPr>
+          <a:xfrm>
+            <a:off x="8046720" y="1417320"/>
+            <a:ext cx="73152" cy="1920240"/>
+          </a:xfrm>
+          <a:prstGeom prst="rect">
+            <a:avLst/>
+          </a:prstGeom>
+          <a:solidFill>
+            <a:srgbClr val="1B9D8C"/>
+          </a:solidFill>
+          <a:ln>
+            <a:noFill/>
+          </a:ln>
+        </p:spPr>
+        <p:style>
+          <a:lnRef idx="1">
+            <a:schemeClr val="accent1"/>
+          </a:lnRef>
+          <a:fillRef idx="3">
+            <a:schemeClr val="accent1"/>
+          </a:fillRef>
+          <a:effectRef idx="2">
+            <a:schemeClr val="accent1"/>
+          </a:effectRef>
+          <a:fontRef idx="minor">
+            <a:schemeClr val="lt1"/>
+          </a:fontRef>
+        </p:style>
+        <p:txBody>
+          <a:bodyPr rtlCol="0" anchor="ctr"/>
+          <a:lstStyle/>
+          <a:p>
+            <a:pPr algn="ctr"/>
+          </a:p>
+        </p:txBody>
+      </p:sp>
+      <p:sp>
+        <p:nvSpPr>
+          <p:cNvPr id="15" name="TextBox 14"/>
+          <p:cNvSpPr txBox="1"/>
+          <p:nvPr/>
+        </p:nvSpPr>
+        <p:spPr>
+          <a:xfrm>
+            <a:off x="8247888" y="1581912"/>
+            <a:ext cx="3154679" cy="256032"/>
+          </a:xfrm>
+          <a:prstGeom prst="rect">
+            <a:avLst/>
+          </a:prstGeom>
+          <a:noFill/>
+        </p:spPr>
+        <p:txBody>
+          <a:bodyPr wrap="square">
+            <a:spAutoFit/>
+          </a:bodyPr>
+          <a:lstStyle/>
+          <a:p>
+            <a:pPr algn="l"/>
+            <a:r>
+              <a:rPr sz="1300" b="1">
+                <a:solidFill>
+                  <a:srgbClr val="F4F7FC"/>
+                </a:solidFill>
+                <a:latin typeface="Aptos"/>
+              </a:rPr>
+              <a:t>3. Take Action</a:t>
+            </a:r>
+          </a:p>
+        </p:txBody>
+      </p:sp>
+      <p:sp>
+        <p:nvSpPr>
+          <p:cNvPr id="16" name="TextBox 15"/>
+          <p:cNvSpPr txBox="1"/>
+          <p:nvPr/>
+        </p:nvSpPr>
+        <p:spPr>
+          <a:xfrm>
+            <a:off x="8247888" y="1920240"/>
+            <a:ext cx="3154679" cy="1298448"/>
+          </a:xfrm>
+          <a:prstGeom prst="rect">
+            <a:avLst/>
+          </a:prstGeom>
+          <a:noFill/>
+        </p:spPr>
+        <p:txBody>
+          <a:bodyPr wrap="square">
+            <a:spAutoFit/>
+          </a:bodyPr>
+          <a:lstStyle/>
+          <a:p>
+            <a:pPr algn="l"/>
+            <a:r>
+              <a:rPr sz="1150" b="0">
+                <a:solidFill>
+                  <a:srgbClr val="B5C4D8"/>
+                </a:solidFill>
+                <a:latin typeface="Aptos"/>
+              </a:rPr>
+              <a:t>• Forecast and risk KPIs
+• Reorder and markdown lists
+• SKU drill-down and CSV export</a:t>
+            </a:r>
+          </a:p>
+        </p:txBody>
+      </p:sp>
+      <p:sp>
+        <p:nvSpPr>
+          <p:cNvPr id="17" name="TextBox 16"/>
+          <p:cNvSpPr txBox="1"/>
+          <p:nvPr/>
+        </p:nvSpPr>
+        <p:spPr>
+          <a:xfrm>
+            <a:off x="777240" y="3794760"/>
+            <a:ext cx="10607040" cy="1828800"/>
+          </a:xfrm>
+          <a:prstGeom prst="rect">
+            <a:avLst/>
+          </a:prstGeom>
+          <a:noFill/>
+        </p:spPr>
+        <p:txBody>
+          <a:bodyPr wrap="square">
+            <a:spAutoFit/>
+          </a:bodyPr>
+          <a:lstStyle/>
+          <a:p>
+            <a:pPr>
+              <a:spcAft>
+                <a:spcPts val="700"/>
+              </a:spcAft>
+              <a:defRPr sz="1600">
+                <a:solidFill>
+                  <a:srgbClr val="F4F7FC"/>
+                </a:solidFill>
+                <a:latin typeface="Aptos"/>
+              </a:defRPr>
+            </a:pPr>
+            <a:r>
+              <a:t>The dashboard recalculates the view from the user's uploaded data.</a:t>
+            </a:r>
+          </a:p>
+          <a:p>
+            <a:pPr>
+              <a:spcAft>
+                <a:spcPts val="700"/>
+              </a:spcAft>
+              <a:defRPr sz="1600">
+                <a:solidFill>
+                  <a:srgbClr val="F4F7FC"/>
+                </a:solidFill>
+                <a:latin typeface="Aptos"/>
+              </a:defRPr>
+            </a:pPr>
+            <a:r>
+              <a:t>Filters support All SKUs or a selected SKU, risk level and category.</a:t>
+            </a:r>
+          </a:p>
+          <a:p>
+            <a:pPr>
+              <a:spcAft>
+                <a:spcPts val="700"/>
+              </a:spcAft>
+              <a:defRPr sz="1600">
+                <a:solidFill>
+                  <a:srgbClr val="F4F7FC"/>
+                </a:solidFill>
+                <a:latin typeface="Aptos"/>
+              </a:defRPr>
+            </a:pPr>
+            <a:r>
+              <a:t>The same workflow supports management monitoring and detailed investigation.</a:t>
+            </a:r>
+          </a:p>
+        </p:txBody>
+      </p:sp>
+    </p:spTree>
+  </p:cSld>
+  <p:clrMapOvr>
+    <a:masterClrMapping/>
+  </p:clrMapOvr>
+</p:sld>
+</file>
+
+<file path=ppt/slides/slide12.xml><?xml version="1.0" encoding="utf-8"?>
+<p:sld xmlns:a="http://schemas.openxmlformats.org/drawingml/2006/main" xmlns:p="http://schemas.openxmlformats.org/presentationml/2006/main" xmlns:r="http://schemas.openxmlformats.org/officeDocument/2006/relationships">
+  <p:cSld>
+    <p:bg>
+      <p:bgPr>
+        <a:solidFill>
+          <a:srgbClr val="0E1D35"/>
+        </a:solidFill>
+        <a:effectLst/>
+      </p:bgPr>
+    </p:bg>
+    <p:spTree>
+      <p:nvGrpSpPr>
+        <p:cNvPr id="1" name=""/>
+        <p:cNvGrpSpPr/>
+        <p:nvPr/>
+      </p:nvGrpSpPr>
+      <p:grpSpPr/>
+      <p:sp>
+        <p:nvSpPr>
+          <p:cNvPr id="2" name="TextBox 1"/>
+          <p:cNvSpPr txBox="1"/>
+          <p:nvPr/>
+        </p:nvSpPr>
+        <p:spPr>
+          <a:xfrm>
+            <a:off x="640080" y="320040"/>
+            <a:ext cx="10972800" cy="365760"/>
+          </a:xfrm>
+          <a:prstGeom prst="rect">
+            <a:avLst/>
+          </a:prstGeom>
+          <a:noFill/>
+        </p:spPr>
+        <p:txBody>
+          <a:bodyPr wrap="square">
+            <a:spAutoFit/>
+          </a:bodyPr>
+          <a:lstStyle/>
+          <a:p>
+            <a:pPr algn="l"/>
+            <a:r>
+              <a:rPr sz="2400" b="1">
+                <a:solidFill>
+                  <a:srgbClr val="F4F7FC"/>
+                </a:solidFill>
+                <a:latin typeface="Aptos"/>
+              </a:rPr>
+              <a:t>Uploaded Data Preview &amp; Standardization</a:t>
+            </a:r>
+          </a:p>
+        </p:txBody>
+      </p:sp>
+      <p:sp>
+        <p:nvSpPr>
+          <p:cNvPr id="3" name="TextBox 2"/>
+          <p:cNvSpPr txBox="1"/>
+          <p:nvPr/>
+        </p:nvSpPr>
+        <p:spPr>
+          <a:xfrm>
+            <a:off x="658368" y="749808"/>
+            <a:ext cx="10972800" cy="274320"/>
+          </a:xfrm>
+          <a:prstGeom prst="rect">
+            <a:avLst/>
+          </a:prstGeom>
+          <a:noFill/>
+        </p:spPr>
+        <p:txBody>
+          <a:bodyPr wrap="square">
+            <a:spAutoFit/>
+          </a:bodyPr>
+          <a:lstStyle/>
+          <a:p>
+            <a:pPr algn="l"/>
+            <a:r>
+              <a:rPr sz="1100" b="0">
+                <a:solidFill>
+                  <a:srgbClr val="B5C4D8"/>
+                </a:solidFill>
+                <a:latin typeface="Aptos"/>
+              </a:rPr>
+              <a:t>Validation and organization of uploaded files before risk reporting.</a:t>
+            </a:r>
+          </a:p>
+        </p:txBody>
+      </p:sp>
+      <p:sp>
+        <p:nvSpPr>
+          <p:cNvPr id="4" name="Rectangle 3"/>
+          <p:cNvSpPr/>
+          <p:nvPr/>
+        </p:nvSpPr>
+        <p:spPr>
+          <a:xfrm>
+            <a:off x="658368" y="1078992"/>
+            <a:ext cx="1188720" cy="50292"/>
+          </a:xfrm>
+          <a:prstGeom prst="rect">
+            <a:avLst/>
+          </a:prstGeom>
+          <a:solidFill>
+            <a:srgbClr val="2CBEC9"/>
+          </a:solidFill>
+          <a:ln>
+            <a:noFill/>
+          </a:ln>
+        </p:spPr>
+        <p:style>
+          <a:lnRef idx="1">
+            <a:schemeClr val="accent1"/>
+          </a:lnRef>
+          <a:fillRef idx="3">
+            <a:schemeClr val="accent1"/>
+          </a:fillRef>
+          <a:effectRef idx="2">
+            <a:schemeClr val="accent1"/>
+          </a:effectRef>
+          <a:fontRef idx="minor">
+            <a:schemeClr val="lt1"/>
+          </a:fontRef>
+        </p:style>
+        <p:txBody>
+          <a:bodyPr rtlCol="0" anchor="ctr"/>
+          <a:lstStyle/>
+          <a:p>
+            <a:pPr algn="ctr"/>
+          </a:p>
+        </p:txBody>
+      </p:sp>
+      <p:sp>
+        <p:nvSpPr>
+          <p:cNvPr id="5" name="Rounded Rectangle 4"/>
+          <p:cNvSpPr/>
+          <p:nvPr/>
+        </p:nvSpPr>
+        <p:spPr>
+          <a:xfrm>
+            <a:off x="640080" y="1417320"/>
+            <a:ext cx="5303520" cy="1828800"/>
+          </a:xfrm>
+          <a:prstGeom prst="roundRect">
+            <a:avLst/>
+          </a:prstGeom>
+          <a:solidFill>
+            <a:srgbClr val="1E3454"/>
+          </a:solidFill>
+          <a:ln>
+            <a:solidFill>
+              <a:srgbClr val="1E3454"/>
+            </a:solidFill>
+          </a:ln>
+        </p:spPr>
+        <p:style>
+          <a:lnRef idx="1">
+            <a:schemeClr val="accent1"/>
+          </a:lnRef>
+          <a:fillRef idx="3">
+            <a:schemeClr val="accent1"/>
+          </a:fillRef>
+          <a:effectRef idx="2">
+            <a:schemeClr val="accent1"/>
+          </a:effectRef>
+          <a:fontRef idx="minor">
+            <a:schemeClr val="lt1"/>
+          </a:fontRef>
+        </p:style>
+        <p:txBody>
+          <a:bodyPr rtlCol="0" anchor="ctr"/>
+          <a:lstStyle/>
+          <a:p>
+            <a:pPr algn="ctr"/>
+          </a:p>
+        </p:txBody>
+      </p:sp>
+      <p:sp>
+        <p:nvSpPr>
+          <p:cNvPr id="6" name="Rectangle 5"/>
+          <p:cNvSpPr/>
+          <p:nvPr/>
+        </p:nvSpPr>
+        <p:spPr>
+          <a:xfrm>
+            <a:off x="640080" y="1417320"/>
+            <a:ext cx="73152" cy="1828800"/>
+          </a:xfrm>
+          <a:prstGeom prst="rect">
+            <a:avLst/>
+          </a:prstGeom>
+          <a:solidFill>
+            <a:srgbClr val="2B70B8"/>
+          </a:solidFill>
+          <a:ln>
+            <a:noFill/>
+          </a:ln>
+        </p:spPr>
+        <p:style>
+          <a:lnRef idx="1">
+            <a:schemeClr val="accent1"/>
+          </a:lnRef>
+          <a:fillRef idx="3">
+            <a:schemeClr val="accent1"/>
+          </a:fillRef>
+          <a:effectRef idx="2">
+            <a:schemeClr val="accent1"/>
+          </a:effectRef>
+          <a:fontRef idx="minor">
+            <a:schemeClr val="lt1"/>
+          </a:fontRef>
+        </p:style>
+        <p:txBody>
+          <a:bodyPr rtlCol="0" anchor="ctr"/>
+          <a:lstStyle/>
+          <a:p>
+            <a:pPr algn="ctr"/>
+          </a:p>
+        </p:txBody>
+      </p:sp>
+      <p:sp>
+        <p:nvSpPr>
+          <p:cNvPr id="7" name="TextBox 6"/>
+          <p:cNvSpPr txBox="1"/>
+          <p:nvPr/>
+        </p:nvSpPr>
+        <p:spPr>
+          <a:xfrm>
+            <a:off x="841247" y="1581912"/>
+            <a:ext cx="4983480" cy="256032"/>
+          </a:xfrm>
+          <a:prstGeom prst="rect">
+            <a:avLst/>
+          </a:prstGeom>
+          <a:noFill/>
+        </p:spPr>
+        <p:txBody>
+          <a:bodyPr wrap="square">
+            <a:spAutoFit/>
+          </a:bodyPr>
+          <a:lstStyle/>
+          <a:p>
+            <a:pPr algn="l"/>
+            <a:r>
+              <a:rPr sz="1300" b="1">
+                <a:solidFill>
+                  <a:srgbClr val="F4F7FC"/>
+                </a:solidFill>
+                <a:latin typeface="Aptos"/>
+              </a:rPr>
+              <a:t>Uploaded Data Preview</a:t>
+            </a:r>
+          </a:p>
+        </p:txBody>
+      </p:sp>
+      <p:sp>
+        <p:nvSpPr>
+          <p:cNvPr id="8" name="TextBox 7"/>
+          <p:cNvSpPr txBox="1"/>
+          <p:nvPr/>
+        </p:nvSpPr>
+        <p:spPr>
+          <a:xfrm>
+            <a:off x="841247" y="1920240"/>
+            <a:ext cx="4983480" cy="1207007"/>
+          </a:xfrm>
+          <a:prstGeom prst="rect">
+            <a:avLst/>
+          </a:prstGeom>
+          <a:noFill/>
+        </p:spPr>
+        <p:txBody>
+          <a:bodyPr wrap="square">
+            <a:spAutoFit/>
+          </a:bodyPr>
+          <a:lstStyle/>
+          <a:p>
+            <a:pPr algn="l"/>
+            <a:r>
+              <a:rPr sz="1150" b="0">
+                <a:solidFill>
+                  <a:srgbClr val="B5C4D8"/>
+                </a:solidFill>
+                <a:latin typeface="Aptos"/>
+              </a:rPr>
+              <a:t>• File names and detected structures
+• Sample records in a table
+• Row and column counts
+• Confirmation of selected files</a:t>
+            </a:r>
+          </a:p>
+        </p:txBody>
+      </p:sp>
+      <p:sp>
+        <p:nvSpPr>
+          <p:cNvPr id="9" name="Rounded Rectangle 8"/>
+          <p:cNvSpPr/>
+          <p:nvPr/>
+        </p:nvSpPr>
+        <p:spPr>
+          <a:xfrm>
+            <a:off x="6172200" y="1417320"/>
+            <a:ext cx="5303520" cy="1828800"/>
+          </a:xfrm>
+          <a:prstGeom prst="roundRect">
+            <a:avLst/>
+          </a:prstGeom>
+          <a:solidFill>
+            <a:srgbClr val="1E3454"/>
+          </a:solidFill>
+          <a:ln>
+            <a:solidFill>
+              <a:srgbClr val="1E3454"/>
+            </a:solidFill>
+          </a:ln>
+        </p:spPr>
+        <p:style>
+          <a:lnRef idx="1">
+            <a:schemeClr val="accent1"/>
+          </a:lnRef>
+          <a:fillRef idx="3">
+            <a:schemeClr val="accent1"/>
+          </a:fillRef>
+          <a:effectRef idx="2">
+            <a:schemeClr val="accent1"/>
+          </a:effectRef>
+          <a:fontRef idx="minor">
+            <a:schemeClr val="lt1"/>
+          </a:fontRef>
+        </p:style>
+        <p:txBody>
+          <a:bodyPr rtlCol="0" anchor="ctr"/>
+          <a:lstStyle/>
+          <a:p>
+            <a:pPr algn="ctr"/>
+          </a:p>
+        </p:txBody>
+      </p:sp>
+      <p:sp>
+        <p:nvSpPr>
+          <p:cNvPr id="10" name="Rectangle 9"/>
+          <p:cNvSpPr/>
+          <p:nvPr/>
+        </p:nvSpPr>
+        <p:spPr>
+          <a:xfrm>
+            <a:off x="6172200" y="1417320"/>
+            <a:ext cx="73152" cy="1828800"/>
+          </a:xfrm>
+          <a:prstGeom prst="rect">
+            <a:avLst/>
+          </a:prstGeom>
+          <a:solidFill>
+            <a:srgbClr val="2CBEC9"/>
+          </a:solidFill>
+          <a:ln>
+            <a:noFill/>
+          </a:ln>
+        </p:spPr>
+        <p:style>
+          <a:lnRef idx="1">
+            <a:schemeClr val="accent1"/>
+          </a:lnRef>
+          <a:fillRef idx="3">
+            <a:schemeClr val="accent1"/>
+          </a:fillRef>
+          <a:effectRef idx="2">
+            <a:schemeClr val="accent1"/>
+          </a:effectRef>
+          <a:fontRef idx="minor">
+            <a:schemeClr val="lt1"/>
+          </a:fontRef>
+        </p:style>
+        <p:txBody>
+          <a:bodyPr rtlCol="0" anchor="ctr"/>
+          <a:lstStyle/>
+          <a:p>
+            <a:pPr algn="ctr"/>
+          </a:p>
+        </p:txBody>
+      </p:sp>
+      <p:sp>
+        <p:nvSpPr>
+          <p:cNvPr id="11" name="TextBox 10"/>
+          <p:cNvSpPr txBox="1"/>
+          <p:nvPr/>
+        </p:nvSpPr>
+        <p:spPr>
+          <a:xfrm>
+            <a:off x="6373368" y="1581912"/>
+            <a:ext cx="4983480" cy="256032"/>
+          </a:xfrm>
+          <a:prstGeom prst="rect">
+            <a:avLst/>
+          </a:prstGeom>
+          <a:noFill/>
+        </p:spPr>
+        <p:txBody>
+          <a:bodyPr wrap="square">
+            <a:spAutoFit/>
+          </a:bodyPr>
+          <a:lstStyle/>
+          <a:p>
+            <a:pPr algn="l"/>
+            <a:r>
+              <a:rPr sz="1300" b="1">
+                <a:solidFill>
+                  <a:srgbClr val="F4F7FC"/>
+                </a:solidFill>
+                <a:latin typeface="Aptos"/>
+              </a:rPr>
+              <a:t>Standardized Uploaded Columns</a:t>
+            </a:r>
+          </a:p>
+        </p:txBody>
+      </p:sp>
+      <p:sp>
+        <p:nvSpPr>
+          <p:cNvPr id="12" name="TextBox 11"/>
+          <p:cNvSpPr txBox="1"/>
+          <p:nvPr/>
+        </p:nvSpPr>
+        <p:spPr>
+          <a:xfrm>
+            <a:off x="6373368" y="1920240"/>
+            <a:ext cx="4983480" cy="1207007"/>
+          </a:xfrm>
+          <a:prstGeom prst="rect">
+            <a:avLst/>
+          </a:prstGeom>
+          <a:noFill/>
+        </p:spPr>
+        <p:txBody>
+          <a:bodyPr wrap="square">
+            <a:spAutoFit/>
+          </a:bodyPr>
+          <a:lstStyle/>
+          <a:p>
+            <a:pPr algn="l"/>
+            <a:r>
+              <a:rPr sz="1150" b="0">
+                <a:solidFill>
+                  <a:srgbClr val="B5C4D8"/>
+                </a:solidFill>
+                <a:latin typeface="Aptos"/>
+              </a:rPr>
+              <a:t>• Common schema mapping
+• SKU, date, demand, inventory and price alignment
+• Consistent processing across CSV formats</a:t>
+            </a:r>
+          </a:p>
+        </p:txBody>
+      </p:sp>
+      <p:sp>
+        <p:nvSpPr>
+          <p:cNvPr id="13" name="Rounded Rectangle 12"/>
+          <p:cNvSpPr/>
+          <p:nvPr/>
+        </p:nvSpPr>
+        <p:spPr>
+          <a:xfrm>
+            <a:off x="640080" y="3520440"/>
+            <a:ext cx="5303520" cy="1828800"/>
+          </a:xfrm>
+          <a:prstGeom prst="roundRect">
+            <a:avLst/>
+          </a:prstGeom>
+          <a:solidFill>
+            <a:srgbClr val="1E3454"/>
+          </a:solidFill>
+          <a:ln>
+            <a:solidFill>
+              <a:srgbClr val="1E3454"/>
+            </a:solidFill>
+          </a:ln>
+        </p:spPr>
+        <p:style>
+          <a:lnRef idx="1">
+            <a:schemeClr val="accent1"/>
+          </a:lnRef>
+          <a:fillRef idx="3">
+            <a:schemeClr val="accent1"/>
+          </a:fillRef>
+          <a:effectRef idx="2">
+            <a:schemeClr val="accent1"/>
+          </a:effectRef>
+          <a:fontRef idx="minor">
+            <a:schemeClr val="lt1"/>
+          </a:fontRef>
+        </p:style>
+        <p:txBody>
+          <a:bodyPr rtlCol="0" anchor="ctr"/>
+          <a:lstStyle/>
+          <a:p>
+            <a:pPr algn="ctr"/>
+          </a:p>
+        </p:txBody>
+      </p:sp>
+      <p:sp>
+        <p:nvSpPr>
+          <p:cNvPr id="14" name="Rectangle 13"/>
+          <p:cNvSpPr/>
+          <p:nvPr/>
+        </p:nvSpPr>
+        <p:spPr>
+          <a:xfrm>
+            <a:off x="640080" y="3520440"/>
+            <a:ext cx="73152" cy="1828800"/>
+          </a:xfrm>
+          <a:prstGeom prst="rect">
+            <a:avLst/>
+          </a:prstGeom>
+          <a:solidFill>
+            <a:srgbClr val="1B9D8C"/>
+          </a:solidFill>
+          <a:ln>
+            <a:noFill/>
+          </a:ln>
+        </p:spPr>
+        <p:style>
+          <a:lnRef idx="1">
+            <a:schemeClr val="accent1"/>
+          </a:lnRef>
+          <a:fillRef idx="3">
+            <a:schemeClr val="accent1"/>
+          </a:fillRef>
+          <a:effectRef idx="2">
+            <a:schemeClr val="accent1"/>
+          </a:effectRef>
+          <a:fontRef idx="minor">
+            <a:schemeClr val="lt1"/>
+          </a:fontRef>
+        </p:style>
+        <p:txBody>
+          <a:bodyPr rtlCol="0" anchor="ctr"/>
+          <a:lstStyle/>
+          <a:p>
+            <a:pPr algn="ctr"/>
+          </a:p>
+        </p:txBody>
+      </p:sp>
+      <p:sp>
+        <p:nvSpPr>
+          <p:cNvPr id="15" name="TextBox 14"/>
+          <p:cNvSpPr txBox="1"/>
+          <p:nvPr/>
+        </p:nvSpPr>
+        <p:spPr>
+          <a:xfrm>
+            <a:off x="841247" y="3685032"/>
+            <a:ext cx="4983480" cy="256032"/>
+          </a:xfrm>
+          <a:prstGeom prst="rect">
+            <a:avLst/>
+          </a:prstGeom>
+          <a:noFill/>
+        </p:spPr>
+        <p:txBody>
+          <a:bodyPr wrap="square">
+            <a:spAutoFit/>
+          </a:bodyPr>
+          <a:lstStyle/>
+          <a:p>
+            <a:pPr algn="l"/>
+            <a:r>
+              <a:rPr sz="1300" b="1">
+                <a:solidFill>
+                  <a:srgbClr val="F4F7FC"/>
+                </a:solidFill>
+                <a:latin typeface="Aptos"/>
+              </a:rPr>
+              <a:t>Combined Uploaded Data</a:t>
+            </a:r>
+          </a:p>
+        </p:txBody>
+      </p:sp>
+      <p:sp>
+        <p:nvSpPr>
+          <p:cNvPr id="16" name="TextBox 15"/>
+          <p:cNvSpPr txBox="1"/>
+          <p:nvPr/>
+        </p:nvSpPr>
+        <p:spPr>
+          <a:xfrm>
+            <a:off x="841247" y="4023360"/>
+            <a:ext cx="4983480" cy="1207007"/>
+          </a:xfrm>
+          <a:prstGeom prst="rect">
+            <a:avLst/>
+          </a:prstGeom>
+          <a:noFill/>
+        </p:spPr>
+        <p:txBody>
+          <a:bodyPr wrap="square">
+            <a:spAutoFit/>
+          </a:bodyPr>
+          <a:lstStyle/>
+          <a:p>
+            <a:pPr algn="l"/>
+            <a:r>
+              <a:rPr sz="1150" b="0">
+                <a:solidFill>
+                  <a:srgbClr val="B5C4D8"/>
+                </a:solidFill>
+                <a:latin typeface="Aptos"/>
+              </a:rPr>
+              <a:t>• Combines uploaded business files
+• Displays total rows and columns
+• Retains detected SKU universe</a:t>
+            </a:r>
+          </a:p>
+        </p:txBody>
+      </p:sp>
+      <p:sp>
+        <p:nvSpPr>
+          <p:cNvPr id="17" name="Rounded Rectangle 16"/>
+          <p:cNvSpPr/>
+          <p:nvPr/>
+        </p:nvSpPr>
+        <p:spPr>
+          <a:xfrm>
+            <a:off x="6172200" y="3520440"/>
+            <a:ext cx="5303520" cy="1828800"/>
+          </a:xfrm>
+          <a:prstGeom prst="roundRect">
+            <a:avLst/>
+          </a:prstGeom>
+          <a:solidFill>
+            <a:srgbClr val="1E3454"/>
+          </a:solidFill>
+          <a:ln>
+            <a:solidFill>
+              <a:srgbClr val="1E3454"/>
+            </a:solidFill>
+          </a:ln>
+        </p:spPr>
+        <p:style>
+          <a:lnRef idx="1">
+            <a:schemeClr val="accent1"/>
+          </a:lnRef>
+          <a:fillRef idx="3">
+            <a:schemeClr val="accent1"/>
+          </a:fillRef>
+          <a:effectRef idx="2">
+            <a:schemeClr val="accent1"/>
+          </a:effectRef>
+          <a:fontRef idx="minor">
+            <a:schemeClr val="lt1"/>
+          </a:fontRef>
+        </p:style>
+        <p:txBody>
+          <a:bodyPr rtlCol="0" anchor="ctr"/>
+          <a:lstStyle/>
+          <a:p>
+            <a:pPr algn="ctr"/>
+          </a:p>
+        </p:txBody>
+      </p:sp>
+      <p:sp>
+        <p:nvSpPr>
+          <p:cNvPr id="18" name="Rectangle 17"/>
+          <p:cNvSpPr/>
+          <p:nvPr/>
+        </p:nvSpPr>
+        <p:spPr>
+          <a:xfrm>
+            <a:off x="6172200" y="3520440"/>
+            <a:ext cx="73152" cy="1828800"/>
+          </a:xfrm>
+          <a:prstGeom prst="rect">
+            <a:avLst/>
+          </a:prstGeom>
+          <a:solidFill>
+            <a:srgbClr val="F48F2D"/>
+          </a:solidFill>
+          <a:ln>
+            <a:noFill/>
+          </a:ln>
+        </p:spPr>
+        <p:style>
+          <a:lnRef idx="1">
+            <a:schemeClr val="accent1"/>
+          </a:lnRef>
+          <a:fillRef idx="3">
+            <a:schemeClr val="accent1"/>
+          </a:fillRef>
+          <a:effectRef idx="2">
+            <a:schemeClr val="accent1"/>
+          </a:effectRef>
+          <a:fontRef idx="minor">
+            <a:schemeClr val="lt1"/>
+          </a:fontRef>
+        </p:style>
+        <p:txBody>
+          <a:bodyPr rtlCol="0" anchor="ctr"/>
+          <a:lstStyle/>
+          <a:p>
+            <a:pPr algn="ctr"/>
+          </a:p>
+        </p:txBody>
+      </p:sp>
+      <p:sp>
+        <p:nvSpPr>
+          <p:cNvPr id="19" name="TextBox 18"/>
+          <p:cNvSpPr txBox="1"/>
+          <p:nvPr/>
+        </p:nvSpPr>
+        <p:spPr>
+          <a:xfrm>
+            <a:off x="6373368" y="3685032"/>
+            <a:ext cx="4983480" cy="256032"/>
+          </a:xfrm>
+          <a:prstGeom prst="rect">
+            <a:avLst/>
+          </a:prstGeom>
+          <a:noFill/>
+        </p:spPr>
+        <p:txBody>
+          <a:bodyPr wrap="square">
+            <a:spAutoFit/>
+          </a:bodyPr>
+          <a:lstStyle/>
+          <a:p>
+            <a:pPr algn="l"/>
+            <a:r>
+              <a:rPr sz="1300" b="1">
+                <a:solidFill>
+                  <a:srgbClr val="F4F7FC"/>
+                </a:solidFill>
+                <a:latin typeface="Aptos"/>
+              </a:rPr>
+              <a:t>SKU Mapping Diagnostics</a:t>
+            </a:r>
+          </a:p>
+        </p:txBody>
+      </p:sp>
+      <p:sp>
+        <p:nvSpPr>
+          <p:cNvPr id="20" name="TextBox 19"/>
+          <p:cNvSpPr txBox="1"/>
+          <p:nvPr/>
+        </p:nvSpPr>
+        <p:spPr>
+          <a:xfrm>
+            <a:off x="6373368" y="4023360"/>
+            <a:ext cx="4983480" cy="1207007"/>
+          </a:xfrm>
+          <a:prstGeom prst="rect">
+            <a:avLst/>
+          </a:prstGeom>
+          <a:noFill/>
+        </p:spPr>
+        <p:txBody>
+          <a:bodyPr wrap="square">
+            <a:spAutoFit/>
+          </a:bodyPr>
+          <a:lstStyle/>
+          <a:p>
+            <a:pPr algn="l"/>
+            <a:r>
+              <a:rPr sz="1150" b="0">
+                <a:solidFill>
+                  <a:srgbClr val="B5C4D8"/>
+                </a:solidFill>
+                <a:latin typeface="Aptos"/>
+              </a:rPr>
+              <a:t>• Duplicate and inconsistent SKU checks
+• Mapping issues highlighted
+• More reliable SKU-level calculations</a:t>
+            </a:r>
+          </a:p>
+        </p:txBody>
+      </p:sp>
+    </p:spTree>
+  </p:cSld>
+  <p:clrMapOvr>
+    <a:masterClrMapping/>
+  </p:clrMapOvr>
+</p:sld>
+</file>
+
+<file path=ppt/slides/slide13.xml><?xml version="1.0" encoding="utf-8"?>
+<p:sld xmlns:a="http://schemas.openxmlformats.org/drawingml/2006/main" xmlns:p="http://schemas.openxmlformats.org/presentationml/2006/main" xmlns:r="http://schemas.openxmlformats.org/officeDocument/2006/relationships">
+  <p:cSld>
+    <p:bg>
+      <p:bgPr>
+        <a:solidFill>
+          <a:srgbClr val="0E1D35"/>
+        </a:solidFill>
+        <a:effectLst/>
+      </p:bgPr>
+    </p:bg>
+    <p:spTree>
+      <p:nvGrpSpPr>
+        <p:cNvPr id="1" name=""/>
+        <p:cNvGrpSpPr/>
+        <p:nvPr/>
+      </p:nvGrpSpPr>
+      <p:grpSpPr/>
+      <p:sp>
+        <p:nvSpPr>
+          <p:cNvPr id="2" name="TextBox 1"/>
+          <p:cNvSpPr txBox="1"/>
+          <p:nvPr/>
+        </p:nvSpPr>
+        <p:spPr>
+          <a:xfrm>
+            <a:off x="640080" y="320040"/>
+            <a:ext cx="10972800" cy="365760"/>
+          </a:xfrm>
+          <a:prstGeom prst="rect">
+            <a:avLst/>
+          </a:prstGeom>
+          <a:noFill/>
+        </p:spPr>
+        <p:txBody>
+          <a:bodyPr wrap="square">
+            <a:spAutoFit/>
+          </a:bodyPr>
+          <a:lstStyle/>
+          <a:p>
+            <a:pPr algn="l"/>
+            <a:r>
+              <a:rPr sz="2400" b="1">
+                <a:solidFill>
+                  <a:srgbClr val="F4F7FC"/>
+                </a:solidFill>
+                <a:latin typeface="Aptos"/>
+              </a:rPr>
+              <a:t>Executive KPIs &amp; Risk Overview</a:t>
+            </a:r>
+          </a:p>
+        </p:txBody>
+      </p:sp>
+      <p:sp>
+        <p:nvSpPr>
+          <p:cNvPr id="3" name="TextBox 2"/>
+          <p:cNvSpPr txBox="1"/>
+          <p:nvPr/>
+        </p:nvSpPr>
+        <p:spPr>
+          <a:xfrm>
+            <a:off x="658368" y="749808"/>
+            <a:ext cx="10972800" cy="274320"/>
+          </a:xfrm>
+          <a:prstGeom prst="rect">
+            <a:avLst/>
+          </a:prstGeom>
+          <a:noFill/>
+        </p:spPr>
+        <p:txBody>
+          <a:bodyPr wrap="square">
+            <a:spAutoFit/>
+          </a:bodyPr>
+          <a:lstStyle/>
+          <a:p>
+            <a:pPr algn="l"/>
+            <a:r>
+              <a:rPr sz="1100" b="0">
+                <a:solidFill>
+                  <a:srgbClr val="B5C4D8"/>
+                </a:solidFill>
+                <a:latin typeface="Aptos"/>
+              </a:rPr>
+              <a:t>Top-level metrics change with the active SKU and risk filters.</a:t>
+            </a:r>
+          </a:p>
+        </p:txBody>
+      </p:sp>
+      <p:sp>
+        <p:nvSpPr>
+          <p:cNvPr id="4" name="Rectangle 3"/>
+          <p:cNvSpPr/>
+          <p:nvPr/>
+        </p:nvSpPr>
+        <p:spPr>
+          <a:xfrm>
+            <a:off x="658368" y="1078992"/>
+            <a:ext cx="1188720" cy="50292"/>
+          </a:xfrm>
+          <a:prstGeom prst="rect">
+            <a:avLst/>
+          </a:prstGeom>
+          <a:solidFill>
+            <a:srgbClr val="2CBEC9"/>
+          </a:solidFill>
+          <a:ln>
+            <a:noFill/>
+          </a:ln>
+        </p:spPr>
+        <p:style>
+          <a:lnRef idx="1">
+            <a:schemeClr val="accent1"/>
+          </a:lnRef>
+          <a:fillRef idx="3">
+            <a:schemeClr val="accent1"/>
+          </a:fillRef>
+          <a:effectRef idx="2">
+            <a:schemeClr val="accent1"/>
+          </a:effectRef>
+          <a:fontRef idx="minor">
+            <a:schemeClr val="lt1"/>
+          </a:fontRef>
+        </p:style>
+        <p:txBody>
+          <a:bodyPr rtlCol="0" anchor="ctr"/>
+          <a:lstStyle/>
+          <a:p>
+            <a:pPr algn="ctr"/>
+          </a:p>
+        </p:txBody>
+      </p:sp>
+      <p:sp>
+        <p:nvSpPr>
+          <p:cNvPr id="5" name="Rounded Rectangle 4"/>
+          <p:cNvSpPr/>
+          <p:nvPr/>
+        </p:nvSpPr>
+        <p:spPr>
+          <a:xfrm>
+            <a:off x="640080" y="1417320"/>
+            <a:ext cx="2560320" cy="1508760"/>
+          </a:xfrm>
+          <a:prstGeom prst="roundRect">
+            <a:avLst/>
+          </a:prstGeom>
+          <a:solidFill>
+            <a:srgbClr val="1E3454"/>
+          </a:solidFill>
+          <a:ln>
+            <a:solidFill>
+              <a:srgbClr val="1E3454"/>
+            </a:solidFill>
+          </a:ln>
+        </p:spPr>
+        <p:style>
+          <a:lnRef idx="1">
+            <a:schemeClr val="accent1"/>
+          </a:lnRef>
+          <a:fillRef idx="3">
+            <a:schemeClr val="accent1"/>
+          </a:fillRef>
+          <a:effectRef idx="2">
+            <a:schemeClr val="accent1"/>
+          </a:effectRef>
+          <a:fontRef idx="minor">
+            <a:schemeClr val="lt1"/>
+          </a:fontRef>
+        </p:style>
+        <p:txBody>
+          <a:bodyPr rtlCol="0" anchor="ctr"/>
+          <a:lstStyle/>
+          <a:p>
+            <a:pPr algn="ctr"/>
+          </a:p>
+        </p:txBody>
+      </p:sp>
+      <p:sp>
+        <p:nvSpPr>
+          <p:cNvPr id="6" name="Rectangle 5"/>
+          <p:cNvSpPr/>
+          <p:nvPr/>
+        </p:nvSpPr>
+        <p:spPr>
+          <a:xfrm>
+            <a:off x="640080" y="1417320"/>
+            <a:ext cx="73152" cy="1508760"/>
+          </a:xfrm>
+          <a:prstGeom prst="rect">
+            <a:avLst/>
+          </a:prstGeom>
+          <a:solidFill>
+            <a:srgbClr val="2CBEC9"/>
+          </a:solidFill>
+          <a:ln>
+            <a:noFill/>
+          </a:ln>
+        </p:spPr>
+        <p:style>
+          <a:lnRef idx="1">
+            <a:schemeClr val="accent1"/>
+          </a:lnRef>
+          <a:fillRef idx="3">
+            <a:schemeClr val="accent1"/>
+          </a:fillRef>
+          <a:effectRef idx="2">
+            <a:schemeClr val="accent1"/>
+          </a:effectRef>
+          <a:fontRef idx="minor">
+            <a:schemeClr val="lt1"/>
+          </a:fontRef>
+        </p:style>
+        <p:txBody>
+          <a:bodyPr rtlCol="0" anchor="ctr"/>
+          <a:lstStyle/>
+          <a:p>
+            <a:pPr algn="ctr"/>
+          </a:p>
+        </p:txBody>
+      </p:sp>
+      <p:sp>
+        <p:nvSpPr>
+          <p:cNvPr id="7" name="TextBox 6"/>
+          <p:cNvSpPr txBox="1"/>
+          <p:nvPr/>
+        </p:nvSpPr>
+        <p:spPr>
+          <a:xfrm>
+            <a:off x="841247" y="1581912"/>
+            <a:ext cx="2240279" cy="256032"/>
+          </a:xfrm>
+          <a:prstGeom prst="rect">
+            <a:avLst/>
+          </a:prstGeom>
+          <a:noFill/>
+        </p:spPr>
+        <p:txBody>
+          <a:bodyPr wrap="square">
+            <a:spAutoFit/>
+          </a:bodyPr>
+          <a:lstStyle/>
+          <a:p>
+            <a:pPr algn="l"/>
+            <a:r>
+              <a:rPr sz="1300" b="1">
+                <a:solidFill>
+                  <a:srgbClr val="F4F7FC"/>
+                </a:solidFill>
+                <a:latin typeface="Aptos"/>
+              </a:rPr>
+              <a:t>Total SKUs</a:t>
+            </a:r>
+          </a:p>
+        </p:txBody>
+      </p:sp>
+      <p:sp>
+        <p:nvSpPr>
+          <p:cNvPr id="8" name="TextBox 7"/>
+          <p:cNvSpPr txBox="1"/>
+          <p:nvPr/>
+        </p:nvSpPr>
+        <p:spPr>
+          <a:xfrm>
+            <a:off x="841247" y="1920240"/>
+            <a:ext cx="2240279" cy="886967"/>
+          </a:xfrm>
+          <a:prstGeom prst="rect">
+            <a:avLst/>
+          </a:prstGeom>
+          <a:noFill/>
+        </p:spPr>
+        <p:txBody>
+          <a:bodyPr wrap="square">
+            <a:spAutoFit/>
+          </a:bodyPr>
+          <a:lstStyle/>
+          <a:p>
+            <a:pPr algn="l"/>
+            <a:r>
+              <a:rPr sz="1150" b="0">
+                <a:solidFill>
+                  <a:srgbClr val="B5C4D8"/>
+                </a:solidFill>
+                <a:latin typeface="Aptos"/>
+              </a:rPr>
+              <a:t>Unique SKUs in the active filtered dataset.</a:t>
+            </a:r>
+          </a:p>
+        </p:txBody>
+      </p:sp>
+      <p:sp>
+        <p:nvSpPr>
+          <p:cNvPr id="9" name="Rounded Rectangle 8"/>
+          <p:cNvSpPr/>
+          <p:nvPr/>
+        </p:nvSpPr>
+        <p:spPr>
+          <a:xfrm>
+            <a:off x="3383280" y="1417320"/>
+            <a:ext cx="2560320" cy="1508760"/>
+          </a:xfrm>
+          <a:prstGeom prst="roundRect">
+            <a:avLst/>
+          </a:prstGeom>
+          <a:solidFill>
+            <a:srgbClr val="1E3454"/>
+          </a:solidFill>
+          <a:ln>
+            <a:solidFill>
+              <a:srgbClr val="1E3454"/>
+            </a:solidFill>
+          </a:ln>
+        </p:spPr>
+        <p:style>
+          <a:lnRef idx="1">
+            <a:schemeClr val="accent1"/>
+          </a:lnRef>
+          <a:fillRef idx="3">
+            <a:schemeClr val="accent1"/>
+          </a:fillRef>
+          <a:effectRef idx="2">
+            <a:schemeClr val="accent1"/>
+          </a:effectRef>
+          <a:fontRef idx="minor">
+            <a:schemeClr val="lt1"/>
+          </a:fontRef>
+        </p:style>
+        <p:txBody>
+          <a:bodyPr rtlCol="0" anchor="ctr"/>
+          <a:lstStyle/>
+          <a:p>
+            <a:pPr algn="ctr"/>
+          </a:p>
+        </p:txBody>
+      </p:sp>
+      <p:sp>
+        <p:nvSpPr>
+          <p:cNvPr id="10" name="Rectangle 9"/>
+          <p:cNvSpPr/>
+          <p:nvPr/>
+        </p:nvSpPr>
+        <p:spPr>
+          <a:xfrm>
+            <a:off x="3383280" y="1417320"/>
+            <a:ext cx="73152" cy="1508760"/>
+          </a:xfrm>
+          <a:prstGeom prst="rect">
+            <a:avLst/>
+          </a:prstGeom>
+          <a:solidFill>
+            <a:srgbClr val="2B70B8"/>
+          </a:solidFill>
+          <a:ln>
+            <a:noFill/>
+          </a:ln>
+        </p:spPr>
+        <p:style>
+          <a:lnRef idx="1">
+            <a:schemeClr val="accent1"/>
+          </a:lnRef>
+          <a:fillRef idx="3">
+            <a:schemeClr val="accent1"/>
+          </a:fillRef>
+          <a:effectRef idx="2">
+            <a:schemeClr val="accent1"/>
+          </a:effectRef>
+          <a:fontRef idx="minor">
+            <a:schemeClr val="lt1"/>
+          </a:fontRef>
+        </p:style>
+        <p:txBody>
+          <a:bodyPr rtlCol="0" anchor="ctr"/>
+          <a:lstStyle/>
+          <a:p>
+            <a:pPr algn="ctr"/>
+          </a:p>
+        </p:txBody>
+      </p:sp>
+      <p:sp>
+        <p:nvSpPr>
+          <p:cNvPr id="11" name="TextBox 10"/>
+          <p:cNvSpPr txBox="1"/>
+          <p:nvPr/>
+        </p:nvSpPr>
+        <p:spPr>
+          <a:xfrm>
+            <a:off x="3584448" y="1581912"/>
+            <a:ext cx="2240279" cy="256032"/>
+          </a:xfrm>
+          <a:prstGeom prst="rect">
+            <a:avLst/>
+          </a:prstGeom>
+          <a:noFill/>
+        </p:spPr>
+        <p:txBody>
+          <a:bodyPr wrap="square">
+            <a:spAutoFit/>
+          </a:bodyPr>
+          <a:lstStyle/>
+          <a:p>
+            <a:pPr algn="l"/>
+            <a:r>
+              <a:rPr sz="1300" b="1">
+                <a:solidFill>
+                  <a:srgbClr val="F4F7FC"/>
+                </a:solidFill>
+                <a:latin typeface="Aptos"/>
+              </a:rPr>
+              <a:t>Forecast Demand</a:t>
+            </a:r>
+          </a:p>
+        </p:txBody>
+      </p:sp>
+      <p:sp>
+        <p:nvSpPr>
+          <p:cNvPr id="12" name="TextBox 11"/>
+          <p:cNvSpPr txBox="1"/>
+          <p:nvPr/>
+        </p:nvSpPr>
+        <p:spPr>
+          <a:xfrm>
+            <a:off x="3584448" y="1920240"/>
+            <a:ext cx="2240279" cy="886967"/>
+          </a:xfrm>
+          <a:prstGeom prst="rect">
+            <a:avLst/>
+          </a:prstGeom>
+          <a:noFill/>
+        </p:spPr>
+        <p:txBody>
+          <a:bodyPr wrap="square">
+            <a:spAutoFit/>
+          </a:bodyPr>
+          <a:lstStyle/>
+          <a:p>
+            <a:pPr algn="l"/>
+            <a:r>
+              <a:rPr sz="1150" b="0">
+                <a:solidFill>
+                  <a:srgbClr val="B5C4D8"/>
+                </a:solidFill>
+                <a:latin typeface="Aptos"/>
+              </a:rPr>
+              <a:t>Total forecast demand for selected SKUs.</a:t>
+            </a:r>
+          </a:p>
+        </p:txBody>
+      </p:sp>
+      <p:sp>
+        <p:nvSpPr>
+          <p:cNvPr id="13" name="Rounded Rectangle 12"/>
+          <p:cNvSpPr/>
+          <p:nvPr/>
+        </p:nvSpPr>
+        <p:spPr>
+          <a:xfrm>
+            <a:off x="6126480" y="1417320"/>
+            <a:ext cx="2560320" cy="1508760"/>
+          </a:xfrm>
+          <a:prstGeom prst="roundRect">
+            <a:avLst/>
+          </a:prstGeom>
+          <a:solidFill>
+            <a:srgbClr val="1E3454"/>
+          </a:solidFill>
+          <a:ln>
+            <a:solidFill>
+              <a:srgbClr val="1E3454"/>
+            </a:solidFill>
+          </a:ln>
+        </p:spPr>
+        <p:style>
+          <a:lnRef idx="1">
+            <a:schemeClr val="accent1"/>
+          </a:lnRef>
+          <a:fillRef idx="3">
+            <a:schemeClr val="accent1"/>
+          </a:fillRef>
+          <a:effectRef idx="2">
+            <a:schemeClr val="accent1"/>
+          </a:effectRef>
+          <a:fontRef idx="minor">
+            <a:schemeClr val="lt1"/>
+          </a:fontRef>
+        </p:style>
+        <p:txBody>
+          <a:bodyPr rtlCol="0" anchor="ctr"/>
+          <a:lstStyle/>
+          <a:p>
+            <a:pPr algn="ctr"/>
+          </a:p>
+        </p:txBody>
+      </p:sp>
+      <p:sp>
+        <p:nvSpPr>
+          <p:cNvPr id="14" name="Rectangle 13"/>
+          <p:cNvSpPr/>
+          <p:nvPr/>
+        </p:nvSpPr>
+        <p:spPr>
+          <a:xfrm>
+            <a:off x="6126480" y="1417320"/>
+            <a:ext cx="73152" cy="1508760"/>
+          </a:xfrm>
+          <a:prstGeom prst="rect">
+            <a:avLst/>
+          </a:prstGeom>
+          <a:solidFill>
+            <a:srgbClr val="F48F2D"/>
+          </a:solidFill>
+          <a:ln>
+            <a:noFill/>
+          </a:ln>
+        </p:spPr>
+        <p:style>
+          <a:lnRef idx="1">
+            <a:schemeClr val="accent1"/>
+          </a:lnRef>
+          <a:fillRef idx="3">
+            <a:schemeClr val="accent1"/>
+          </a:fillRef>
+          <a:effectRef idx="2">
+            <a:schemeClr val="accent1"/>
+          </a:effectRef>
+          <a:fontRef idx="minor">
+            <a:schemeClr val="lt1"/>
+          </a:fontRef>
+        </p:style>
+        <p:txBody>
+          <a:bodyPr rtlCol="0" anchor="ctr"/>
+          <a:lstStyle/>
+          <a:p>
+            <a:pPr algn="ctr"/>
+          </a:p>
+        </p:txBody>
+      </p:sp>
+      <p:sp>
+        <p:nvSpPr>
+          <p:cNvPr id="15" name="TextBox 14"/>
+          <p:cNvSpPr txBox="1"/>
+          <p:nvPr/>
+        </p:nvSpPr>
+        <p:spPr>
+          <a:xfrm>
+            <a:off x="6327648" y="1581912"/>
+            <a:ext cx="2240279" cy="256032"/>
+          </a:xfrm>
+          <a:prstGeom prst="rect">
+            <a:avLst/>
+          </a:prstGeom>
+          <a:noFill/>
+        </p:spPr>
+        <p:txBody>
+          <a:bodyPr wrap="square">
+            <a:spAutoFit/>
+          </a:bodyPr>
+          <a:lstStyle/>
+          <a:p>
+            <a:pPr algn="l"/>
+            <a:r>
+              <a:rPr sz="1300" b="1">
+                <a:solidFill>
+                  <a:srgbClr val="F4F7FC"/>
+                </a:solidFill>
+                <a:latin typeface="Aptos"/>
+              </a:rPr>
+              <a:t>Value at Risk</a:t>
+            </a:r>
+          </a:p>
+        </p:txBody>
+      </p:sp>
+      <p:sp>
+        <p:nvSpPr>
+          <p:cNvPr id="16" name="TextBox 15"/>
+          <p:cNvSpPr txBox="1"/>
+          <p:nvPr/>
+        </p:nvSpPr>
+        <p:spPr>
+          <a:xfrm>
+            <a:off x="6327648" y="1920240"/>
+            <a:ext cx="2240279" cy="886967"/>
+          </a:xfrm>
+          <a:prstGeom prst="rect">
+            <a:avLst/>
+          </a:prstGeom>
+          <a:noFill/>
+        </p:spPr>
+        <p:txBody>
+          <a:bodyPr wrap="square">
+            <a:spAutoFit/>
+          </a:bodyPr>
+          <a:lstStyle/>
+          <a:p>
+            <a:pPr algn="l"/>
+            <a:r>
+              <a:rPr sz="1150" b="0">
+                <a:solidFill>
+                  <a:srgbClr val="B5C4D8"/>
+                </a:solidFill>
+                <a:latin typeface="Aptos"/>
+              </a:rPr>
+              <a:t>Estimated exposure linked to inventory shortfall.</a:t>
+            </a:r>
+          </a:p>
+        </p:txBody>
+      </p:sp>
+      <p:sp>
+        <p:nvSpPr>
+          <p:cNvPr id="17" name="Rounded Rectangle 16"/>
+          <p:cNvSpPr/>
+          <p:nvPr/>
+        </p:nvSpPr>
+        <p:spPr>
+          <a:xfrm>
+            <a:off x="8869680" y="1417320"/>
+            <a:ext cx="2560320" cy="1508760"/>
+          </a:xfrm>
+          <a:prstGeom prst="roundRect">
+            <a:avLst/>
+          </a:prstGeom>
+          <a:solidFill>
+            <a:srgbClr val="1E3454"/>
+          </a:solidFill>
+          <a:ln>
+            <a:solidFill>
+              <a:srgbClr val="1E3454"/>
+            </a:solidFill>
+          </a:ln>
+        </p:spPr>
+        <p:style>
+          <a:lnRef idx="1">
+            <a:schemeClr val="accent1"/>
+          </a:lnRef>
+          <a:fillRef idx="3">
+            <a:schemeClr val="accent1"/>
+          </a:fillRef>
+          <a:effectRef idx="2">
+            <a:schemeClr val="accent1"/>
+          </a:effectRef>
+          <a:fontRef idx="minor">
+            <a:schemeClr val="lt1"/>
+          </a:fontRef>
+        </p:style>
+        <p:txBody>
+          <a:bodyPr rtlCol="0" anchor="ctr"/>
+          <a:lstStyle/>
+          <a:p>
+            <a:pPr algn="ctr"/>
+          </a:p>
+        </p:txBody>
+      </p:sp>
+      <p:sp>
+        <p:nvSpPr>
+          <p:cNvPr id="18" name="Rectangle 17"/>
+          <p:cNvSpPr/>
+          <p:nvPr/>
+        </p:nvSpPr>
+        <p:spPr>
+          <a:xfrm>
+            <a:off x="8869680" y="1417320"/>
+            <a:ext cx="73152" cy="1508760"/>
+          </a:xfrm>
+          <a:prstGeom prst="rect">
+            <a:avLst/>
+          </a:prstGeom>
+          <a:solidFill>
+            <a:srgbClr val="DA4553"/>
+          </a:solidFill>
+          <a:ln>
+            <a:noFill/>
+          </a:ln>
+        </p:spPr>
+        <p:style>
+          <a:lnRef idx="1">
+            <a:schemeClr val="accent1"/>
+          </a:lnRef>
+          <a:fillRef idx="3">
+            <a:schemeClr val="accent1"/>
+          </a:fillRef>
+          <a:effectRef idx="2">
+            <a:schemeClr val="accent1"/>
+          </a:effectRef>
+          <a:fontRef idx="minor">
+            <a:schemeClr val="lt1"/>
+          </a:fontRef>
+        </p:style>
+        <p:txBody>
+          <a:bodyPr rtlCol="0" anchor="ctr"/>
+          <a:lstStyle/>
+          <a:p>
+            <a:pPr algn="ctr"/>
+          </a:p>
+        </p:txBody>
+      </p:sp>
+      <p:sp>
+        <p:nvSpPr>
+          <p:cNvPr id="19" name="TextBox 18"/>
+          <p:cNvSpPr txBox="1"/>
+          <p:nvPr/>
+        </p:nvSpPr>
+        <p:spPr>
+          <a:xfrm>
+            <a:off x="9070848" y="1581912"/>
+            <a:ext cx="2240279" cy="256032"/>
+          </a:xfrm>
+          <a:prstGeom prst="rect">
+            <a:avLst/>
+          </a:prstGeom>
+          <a:noFill/>
+        </p:spPr>
+        <p:txBody>
+          <a:bodyPr wrap="square">
+            <a:spAutoFit/>
+          </a:bodyPr>
+          <a:lstStyle/>
+          <a:p>
+            <a:pPr algn="l"/>
+            <a:r>
+              <a:rPr sz="1300" b="1">
+                <a:solidFill>
+                  <a:srgbClr val="F4F7FC"/>
+                </a:solidFill>
+                <a:latin typeface="Aptos"/>
+              </a:rPr>
+              <a:t>At High Risk</a:t>
+            </a:r>
+          </a:p>
+        </p:txBody>
+      </p:sp>
+      <p:sp>
+        <p:nvSpPr>
+          <p:cNvPr id="20" name="TextBox 19"/>
+          <p:cNvSpPr txBox="1"/>
+          <p:nvPr/>
+        </p:nvSpPr>
+        <p:spPr>
+          <a:xfrm>
+            <a:off x="9070848" y="1920240"/>
+            <a:ext cx="2240279" cy="886967"/>
+          </a:xfrm>
+          <a:prstGeom prst="rect">
+            <a:avLst/>
+          </a:prstGeom>
+          <a:noFill/>
+        </p:spPr>
+        <p:txBody>
+          <a:bodyPr wrap="square">
+            <a:spAutoFit/>
+          </a:bodyPr>
+          <a:lstStyle/>
+          <a:p>
+            <a:pPr algn="l"/>
+            <a:r>
+              <a:rPr sz="1150" b="0">
+                <a:solidFill>
+                  <a:srgbClr val="B5C4D8"/>
+                </a:solidFill>
+                <a:latin typeface="Aptos"/>
+              </a:rPr>
+              <a:t>SKUs requiring urgent attention.</a:t>
+            </a:r>
+          </a:p>
+        </p:txBody>
+      </p:sp>
+      <p:sp>
+        <p:nvSpPr>
+          <p:cNvPr id="21" name="TextBox 20"/>
+          <p:cNvSpPr txBox="1"/>
+          <p:nvPr/>
+        </p:nvSpPr>
+        <p:spPr>
+          <a:xfrm>
+            <a:off x="777240" y="3337560"/>
+            <a:ext cx="5212080" cy="2103120"/>
+          </a:xfrm>
+          <a:prstGeom prst="rect">
+            <a:avLst/>
+          </a:prstGeom>
+          <a:noFill/>
+        </p:spPr>
+        <p:txBody>
+          <a:bodyPr wrap="square">
+            <a:spAutoFit/>
+          </a:bodyPr>
+          <a:lstStyle/>
+          <a:p>
+            <a:pPr>
+              <a:spcAft>
+                <a:spcPts val="700"/>
+              </a:spcAft>
+              <a:defRPr sz="1600">
+                <a:solidFill>
+                  <a:srgbClr val="F4F7FC"/>
+                </a:solidFill>
+                <a:latin typeface="Aptos"/>
+              </a:defRPr>
+            </a:pPr>
+            <a:r>
+              <a:t>Risk Overview groups SKUs by risk level.</a:t>
+            </a:r>
+          </a:p>
+          <a:p>
+            <a:pPr>
+              <a:spcAft>
+                <a:spcPts val="700"/>
+              </a:spcAft>
+              <a:defRPr sz="1600">
+                <a:solidFill>
+                  <a:srgbClr val="F4F7FC"/>
+                </a:solidFill>
+                <a:latin typeface="Aptos"/>
+              </a:defRPr>
+            </a:pPr>
+            <a:r>
+              <a:t>Risk chart visualizes counts by category.</a:t>
+            </a:r>
+          </a:p>
+          <a:p>
+            <a:pPr>
+              <a:spcAft>
+                <a:spcPts val="700"/>
+              </a:spcAft>
+              <a:defRPr sz="1600">
+                <a:solidFill>
+                  <a:srgbClr val="F4F7FC"/>
+                </a:solidFill>
+                <a:latin typeface="Aptos"/>
+              </a:defRPr>
+            </a:pPr>
+            <a:r>
+              <a:t>Categories include Reorder Now, Monitor and Overstock.</a:t>
+            </a:r>
+          </a:p>
+        </p:txBody>
+      </p:sp>
+      <p:sp>
+        <p:nvSpPr>
+          <p:cNvPr id="22" name="TextBox 21"/>
+          <p:cNvSpPr txBox="1"/>
+          <p:nvPr/>
+        </p:nvSpPr>
+        <p:spPr>
+          <a:xfrm>
+            <a:off x="6217920" y="3337560"/>
+            <a:ext cx="5212080" cy="2103120"/>
+          </a:xfrm>
+          <a:prstGeom prst="rect">
+            <a:avLst/>
+          </a:prstGeom>
+          <a:noFill/>
+        </p:spPr>
+        <p:txBody>
+          <a:bodyPr wrap="square">
+            <a:spAutoFit/>
+          </a:bodyPr>
+          <a:lstStyle/>
+          <a:p>
+            <a:pPr>
+              <a:spcAft>
+                <a:spcPts val="700"/>
+              </a:spcAft>
+              <a:defRPr sz="1600">
+                <a:solidFill>
+                  <a:srgbClr val="F4F7FC"/>
+                </a:solidFill>
+                <a:latin typeface="Aptos"/>
+              </a:defRPr>
+            </a:pPr>
+            <a:r>
+              <a:t>Risk Summary separates reorder, overstock, combined risk and no-immediate-risk groups.</a:t>
+            </a:r>
+          </a:p>
+          <a:p>
+            <a:pPr>
+              <a:spcAft>
+                <a:spcPts val="700"/>
+              </a:spcAft>
+              <a:defRPr sz="1600">
+                <a:solidFill>
+                  <a:srgbClr val="F4F7FC"/>
+                </a:solidFill>
+                <a:latin typeface="Aptos"/>
+              </a:defRPr>
+            </a:pPr>
+            <a:r>
+              <a:t>Sidebar filters support focused SKU-level investigation.</a:t>
+            </a:r>
+          </a:p>
+        </p:txBody>
+      </p:sp>
+    </p:spTree>
+  </p:cSld>
+  <p:clrMapOvr>
+    <a:masterClrMapping/>
+  </p:clrMapOvr>
+</p:sld>
+</file>
+
+<file path=ppt/slides/slide14.xml><?xml version="1.0" encoding="utf-8"?>
+<p:sld xmlns:a="http://schemas.openxmlformats.org/drawingml/2006/main" xmlns:p="http://schemas.openxmlformats.org/presentationml/2006/main" xmlns:r="http://schemas.openxmlformats.org/officeDocument/2006/relationships">
+  <p:cSld>
+    <p:bg>
+      <p:bgPr>
+        <a:solidFill>
+          <a:srgbClr val="0E1D35"/>
+        </a:solidFill>
+        <a:effectLst/>
+      </p:bgPr>
+    </p:bg>
+    <p:spTree>
+      <p:nvGrpSpPr>
+        <p:cNvPr id="1" name=""/>
+        <p:cNvGrpSpPr/>
+        <p:nvPr/>
+      </p:nvGrpSpPr>
+      <p:grpSpPr/>
+      <p:sp>
+        <p:nvSpPr>
+          <p:cNvPr id="2" name="TextBox 1"/>
+          <p:cNvSpPr txBox="1"/>
+          <p:nvPr/>
+        </p:nvSpPr>
+        <p:spPr>
+          <a:xfrm>
+            <a:off x="640080" y="320040"/>
+            <a:ext cx="10972800" cy="365760"/>
+          </a:xfrm>
+          <a:prstGeom prst="rect">
+            <a:avLst/>
+          </a:prstGeom>
+          <a:noFill/>
+        </p:spPr>
+        <p:txBody>
+          <a:bodyPr wrap="square">
+            <a:spAutoFit/>
+          </a:bodyPr>
+          <a:lstStyle/>
+          <a:p>
+            <a:pPr algn="l"/>
+            <a:r>
+              <a:rPr sz="2400" b="1">
+                <a:solidFill>
+                  <a:srgbClr val="F4F7FC"/>
+                </a:solidFill>
+                <a:latin typeface="Aptos"/>
+              </a:rPr>
+              <a:t>Forecast Analysis &amp; Uncertainty Monitoring</a:t>
+            </a:r>
+          </a:p>
+        </p:txBody>
+      </p:sp>
+      <p:sp>
+        <p:nvSpPr>
+          <p:cNvPr id="3" name="TextBox 2"/>
+          <p:cNvSpPr txBox="1"/>
+          <p:nvPr/>
+        </p:nvSpPr>
+        <p:spPr>
+          <a:xfrm>
+            <a:off x="658368" y="749808"/>
+            <a:ext cx="10972800" cy="274320"/>
+          </a:xfrm>
+          <a:prstGeom prst="rect">
+            <a:avLst/>
+          </a:prstGeom>
+          <a:noFill/>
+        </p:spPr>
+        <p:txBody>
+          <a:bodyPr wrap="square">
+            <a:spAutoFit/>
+          </a:bodyPr>
+          <a:lstStyle/>
+          <a:p>
+            <a:pPr algn="l"/>
+            <a:r>
+              <a:rPr sz="1100" b="0">
+                <a:solidFill>
+                  <a:srgbClr val="B5C4D8"/>
+                </a:solidFill>
+                <a:latin typeface="Aptos"/>
+              </a:rPr>
+              <a:t>Compare demand history with forecast output and uncertainty.</a:t>
+            </a:r>
+          </a:p>
+        </p:txBody>
+      </p:sp>
+      <p:sp>
+        <p:nvSpPr>
+          <p:cNvPr id="4" name="Rectangle 3"/>
+          <p:cNvSpPr/>
+          <p:nvPr/>
+        </p:nvSpPr>
+        <p:spPr>
+          <a:xfrm>
+            <a:off x="658368" y="1078992"/>
+            <a:ext cx="1188720" cy="50292"/>
+          </a:xfrm>
+          <a:prstGeom prst="rect">
+            <a:avLst/>
+          </a:prstGeom>
+          <a:solidFill>
+            <a:srgbClr val="2CBEC9"/>
+          </a:solidFill>
+          <a:ln>
+            <a:noFill/>
+          </a:ln>
+        </p:spPr>
+        <p:style>
+          <a:lnRef idx="1">
+            <a:schemeClr val="accent1"/>
+          </a:lnRef>
+          <a:fillRef idx="3">
+            <a:schemeClr val="accent1"/>
+          </a:fillRef>
+          <a:effectRef idx="2">
+            <a:schemeClr val="accent1"/>
+          </a:effectRef>
+          <a:fontRef idx="minor">
+            <a:schemeClr val="lt1"/>
+          </a:fontRef>
+        </p:style>
+        <p:txBody>
+          <a:bodyPr rtlCol="0" anchor="ctr"/>
+          <a:lstStyle/>
+          <a:p>
+            <a:pPr algn="ctr"/>
+          </a:p>
+        </p:txBody>
+      </p:sp>
+      <p:sp>
+        <p:nvSpPr>
+          <p:cNvPr id="5" name="Rounded Rectangle 4"/>
+          <p:cNvSpPr/>
+          <p:nvPr/>
+        </p:nvSpPr>
+        <p:spPr>
+          <a:xfrm>
+            <a:off x="640080" y="1417320"/>
+            <a:ext cx="5303520" cy="1828800"/>
+          </a:xfrm>
+          <a:prstGeom prst="roundRect">
+            <a:avLst/>
+          </a:prstGeom>
+          <a:solidFill>
+            <a:srgbClr val="1E3454"/>
+          </a:solidFill>
+          <a:ln>
+            <a:solidFill>
+              <a:srgbClr val="1E3454"/>
+            </a:solidFill>
+          </a:ln>
+        </p:spPr>
+        <p:style>
+          <a:lnRef idx="1">
+            <a:schemeClr val="accent1"/>
+          </a:lnRef>
+          <a:fillRef idx="3">
+            <a:schemeClr val="accent1"/>
+          </a:fillRef>
+          <a:effectRef idx="2">
+            <a:schemeClr val="accent1"/>
+          </a:effectRef>
+          <a:fontRef idx="minor">
+            <a:schemeClr val="lt1"/>
+          </a:fontRef>
+        </p:style>
+        <p:txBody>
+          <a:bodyPr rtlCol="0" anchor="ctr"/>
+          <a:lstStyle/>
+          <a:p>
+            <a:pPr algn="ctr"/>
+          </a:p>
+        </p:txBody>
+      </p:sp>
+      <p:sp>
+        <p:nvSpPr>
+          <p:cNvPr id="6" name="Rectangle 5"/>
+          <p:cNvSpPr/>
+          <p:nvPr/>
+        </p:nvSpPr>
+        <p:spPr>
+          <a:xfrm>
+            <a:off x="640080" y="1417320"/>
+            <a:ext cx="73152" cy="1828800"/>
+          </a:xfrm>
+          <a:prstGeom prst="rect">
+            <a:avLst/>
+          </a:prstGeom>
+          <a:solidFill>
+            <a:srgbClr val="2B70B8"/>
+          </a:solidFill>
+          <a:ln>
+            <a:noFill/>
+          </a:ln>
+        </p:spPr>
+        <p:style>
+          <a:lnRef idx="1">
+            <a:schemeClr val="accent1"/>
+          </a:lnRef>
+          <a:fillRef idx="3">
+            <a:schemeClr val="accent1"/>
+          </a:fillRef>
+          <a:effectRef idx="2">
+            <a:schemeClr val="accent1"/>
+          </a:effectRef>
+          <a:fontRef idx="minor">
+            <a:schemeClr val="lt1"/>
+          </a:fontRef>
+        </p:style>
+        <p:txBody>
+          <a:bodyPr rtlCol="0" anchor="ctr"/>
+          <a:lstStyle/>
+          <a:p>
+            <a:pPr algn="ctr"/>
+          </a:p>
+        </p:txBody>
+      </p:sp>
+      <p:sp>
+        <p:nvSpPr>
+          <p:cNvPr id="7" name="TextBox 6"/>
+          <p:cNvSpPr txBox="1"/>
+          <p:nvPr/>
+        </p:nvSpPr>
+        <p:spPr>
+          <a:xfrm>
+            <a:off x="841247" y="1581912"/>
+            <a:ext cx="4983480" cy="256032"/>
+          </a:xfrm>
+          <a:prstGeom prst="rect">
+            <a:avLst/>
+          </a:prstGeom>
+          <a:noFill/>
+        </p:spPr>
+        <p:txBody>
+          <a:bodyPr wrap="square">
+            <a:spAutoFit/>
+          </a:bodyPr>
+          <a:lstStyle/>
+          <a:p>
+            <a:pPr algn="l"/>
+            <a:r>
+              <a:rPr sz="1300" b="1">
+                <a:solidFill>
+                  <a:srgbClr val="F4F7FC"/>
+                </a:solidFill>
+                <a:latin typeface="Aptos"/>
+              </a:rPr>
+              <a:t>Forecast Date Filter</a:t>
+            </a:r>
+          </a:p>
+        </p:txBody>
+      </p:sp>
+      <p:sp>
+        <p:nvSpPr>
+          <p:cNvPr id="8" name="TextBox 7"/>
+          <p:cNvSpPr txBox="1"/>
+          <p:nvPr/>
+        </p:nvSpPr>
+        <p:spPr>
+          <a:xfrm>
+            <a:off x="841247" y="1920240"/>
+            <a:ext cx="4983480" cy="1207007"/>
+          </a:xfrm>
+          <a:prstGeom prst="rect">
+            <a:avLst/>
+          </a:prstGeom>
+          <a:noFill/>
+        </p:spPr>
+        <p:txBody>
+          <a:bodyPr wrap="square">
+            <a:spAutoFit/>
+          </a:bodyPr>
+          <a:lstStyle/>
+          <a:p>
+            <a:pPr algn="l"/>
+            <a:r>
+              <a:rPr sz="1150" b="0">
+                <a:solidFill>
+                  <a:srgbClr val="B5C4D8"/>
+                </a:solidFill>
+                <a:latin typeface="Aptos"/>
+              </a:rPr>
+              <a:t>• Select forecast date range
+• View active forecast horizon
+• Analyze a specific period</a:t>
+            </a:r>
+          </a:p>
+        </p:txBody>
+      </p:sp>
+      <p:sp>
+        <p:nvSpPr>
+          <p:cNvPr id="9" name="Rounded Rectangle 8"/>
+          <p:cNvSpPr/>
+          <p:nvPr/>
+        </p:nvSpPr>
+        <p:spPr>
+          <a:xfrm>
+            <a:off x="6172200" y="1417320"/>
+            <a:ext cx="5303520" cy="1828800"/>
+          </a:xfrm>
+          <a:prstGeom prst="roundRect">
+            <a:avLst/>
+          </a:prstGeom>
+          <a:solidFill>
+            <a:srgbClr val="1E3454"/>
+          </a:solidFill>
+          <a:ln>
+            <a:solidFill>
+              <a:srgbClr val="1E3454"/>
+            </a:solidFill>
+          </a:ln>
+        </p:spPr>
+        <p:style>
+          <a:lnRef idx="1">
+            <a:schemeClr val="accent1"/>
+          </a:lnRef>
+          <a:fillRef idx="3">
+            <a:schemeClr val="accent1"/>
+          </a:fillRef>
+          <a:effectRef idx="2">
+            <a:schemeClr val="accent1"/>
+          </a:effectRef>
+          <a:fontRef idx="minor">
+            <a:schemeClr val="lt1"/>
+          </a:fontRef>
+        </p:style>
+        <p:txBody>
+          <a:bodyPr rtlCol="0" anchor="ctr"/>
+          <a:lstStyle/>
+          <a:p>
+            <a:pPr algn="ctr"/>
+          </a:p>
+        </p:txBody>
+      </p:sp>
+      <p:sp>
+        <p:nvSpPr>
+          <p:cNvPr id="10" name="Rectangle 9"/>
+          <p:cNvSpPr/>
+          <p:nvPr/>
+        </p:nvSpPr>
+        <p:spPr>
+          <a:xfrm>
+            <a:off x="6172200" y="1417320"/>
+            <a:ext cx="73152" cy="1828800"/>
+          </a:xfrm>
+          <a:prstGeom prst="rect">
+            <a:avLst/>
+          </a:prstGeom>
+          <a:solidFill>
+            <a:srgbClr val="2CBEC9"/>
+          </a:solidFill>
+          <a:ln>
+            <a:noFill/>
+          </a:ln>
+        </p:spPr>
+        <p:style>
+          <a:lnRef idx="1">
+            <a:schemeClr val="accent1"/>
+          </a:lnRef>
+          <a:fillRef idx="3">
+            <a:schemeClr val="accent1"/>
+          </a:fillRef>
+          <a:effectRef idx="2">
+            <a:schemeClr val="accent1"/>
+          </a:effectRef>
+          <a:fontRef idx="minor">
+            <a:schemeClr val="lt1"/>
+          </a:fontRef>
+        </p:style>
+        <p:txBody>
+          <a:bodyPr rtlCol="0" anchor="ctr"/>
+          <a:lstStyle/>
+          <a:p>
+            <a:pPr algn="ctr"/>
+          </a:p>
+        </p:txBody>
+      </p:sp>
+      <p:sp>
+        <p:nvSpPr>
+          <p:cNvPr id="11" name="TextBox 10"/>
+          <p:cNvSpPr txBox="1"/>
+          <p:nvPr/>
+        </p:nvSpPr>
+        <p:spPr>
+          <a:xfrm>
+            <a:off x="6373368" y="1581912"/>
+            <a:ext cx="4983480" cy="256032"/>
+          </a:xfrm>
+          <a:prstGeom prst="rect">
+            <a:avLst/>
+          </a:prstGeom>
+          <a:noFill/>
+        </p:spPr>
+        <p:txBody>
+          <a:bodyPr wrap="square">
+            <a:spAutoFit/>
+          </a:bodyPr>
+          <a:lstStyle/>
+          <a:p>
+            <a:pPr algn="l"/>
+            <a:r>
+              <a:rPr sz="1300" b="1">
+                <a:solidFill>
+                  <a:srgbClr val="F4F7FC"/>
+                </a:solidFill>
+                <a:latin typeface="Aptos"/>
+              </a:rPr>
+              <a:t>Forecast vs Actual</a:t>
+            </a:r>
+          </a:p>
+        </p:txBody>
+      </p:sp>
+      <p:sp>
+        <p:nvSpPr>
+          <p:cNvPr id="12" name="TextBox 11"/>
+          <p:cNvSpPr txBox="1"/>
+          <p:nvPr/>
+        </p:nvSpPr>
+        <p:spPr>
+          <a:xfrm>
+            <a:off x="6373368" y="1920240"/>
+            <a:ext cx="4983480" cy="1207007"/>
+          </a:xfrm>
+          <a:prstGeom prst="rect">
+            <a:avLst/>
+          </a:prstGeom>
+          <a:noFill/>
+        </p:spPr>
+        <p:txBody>
+          <a:bodyPr wrap="square">
+            <a:spAutoFit/>
+          </a:bodyPr>
+          <a:lstStyle/>
+          <a:p>
+            <a:pPr algn="l"/>
+            <a:r>
+              <a:rPr sz="1150" b="0">
+                <a:solidFill>
+                  <a:srgbClr val="B5C4D8"/>
+                </a:solidFill>
+                <a:latin typeface="Aptos"/>
+              </a:rPr>
+              <a:t>• Aggregate actual and forecast demand
+• Selected-SKU demand view
+• Time-based trend chart</a:t>
+            </a:r>
+          </a:p>
+        </p:txBody>
+      </p:sp>
+      <p:sp>
+        <p:nvSpPr>
+          <p:cNvPr id="13" name="Rounded Rectangle 12"/>
+          <p:cNvSpPr/>
+          <p:nvPr/>
+        </p:nvSpPr>
+        <p:spPr>
+          <a:xfrm>
+            <a:off x="640080" y="3520440"/>
+            <a:ext cx="5303520" cy="1828800"/>
+          </a:xfrm>
+          <a:prstGeom prst="roundRect">
+            <a:avLst/>
+          </a:prstGeom>
+          <a:solidFill>
+            <a:srgbClr val="1E3454"/>
+          </a:solidFill>
+          <a:ln>
+            <a:solidFill>
+              <a:srgbClr val="1E3454"/>
+            </a:solidFill>
+          </a:ln>
+        </p:spPr>
+        <p:style>
+          <a:lnRef idx="1">
+            <a:schemeClr val="accent1"/>
+          </a:lnRef>
+          <a:fillRef idx="3">
+            <a:schemeClr val="accent1"/>
+          </a:fillRef>
+          <a:effectRef idx="2">
+            <a:schemeClr val="accent1"/>
+          </a:effectRef>
+          <a:fontRef idx="minor">
+            <a:schemeClr val="lt1"/>
+          </a:fontRef>
+        </p:style>
+        <p:txBody>
+          <a:bodyPr rtlCol="0" anchor="ctr"/>
+          <a:lstStyle/>
+          <a:p>
+            <a:pPr algn="ctr"/>
+          </a:p>
+        </p:txBody>
+      </p:sp>
+      <p:sp>
+        <p:nvSpPr>
+          <p:cNvPr id="14" name="Rectangle 13"/>
+          <p:cNvSpPr/>
+          <p:nvPr/>
+        </p:nvSpPr>
+        <p:spPr>
+          <a:xfrm>
+            <a:off x="640080" y="3520440"/>
+            <a:ext cx="73152" cy="1828800"/>
+          </a:xfrm>
+          <a:prstGeom prst="rect">
+            <a:avLst/>
+          </a:prstGeom>
+          <a:solidFill>
+            <a:srgbClr val="F48F2D"/>
+          </a:solidFill>
+          <a:ln>
+            <a:noFill/>
+          </a:ln>
+        </p:spPr>
+        <p:style>
+          <a:lnRef idx="1">
+            <a:schemeClr val="accent1"/>
+          </a:lnRef>
+          <a:fillRef idx="3">
+            <a:schemeClr val="accent1"/>
+          </a:fillRef>
+          <a:effectRef idx="2">
+            <a:schemeClr val="accent1"/>
+          </a:effectRef>
+          <a:fontRef idx="minor">
+            <a:schemeClr val="lt1"/>
+          </a:fontRef>
+        </p:style>
+        <p:txBody>
+          <a:bodyPr rtlCol="0" anchor="ctr"/>
+          <a:lstStyle/>
+          <a:p>
+            <a:pPr algn="ctr"/>
+          </a:p>
+        </p:txBody>
+      </p:sp>
+      <p:sp>
+        <p:nvSpPr>
+          <p:cNvPr id="15" name="TextBox 14"/>
+          <p:cNvSpPr txBox="1"/>
+          <p:nvPr/>
+        </p:nvSpPr>
+        <p:spPr>
+          <a:xfrm>
+            <a:off x="841247" y="3685032"/>
+            <a:ext cx="4983480" cy="256032"/>
+          </a:xfrm>
+          <a:prstGeom prst="rect">
+            <a:avLst/>
+          </a:prstGeom>
+          <a:noFill/>
+        </p:spPr>
+        <p:txBody>
+          <a:bodyPr wrap="square">
+            <a:spAutoFit/>
+          </a:bodyPr>
+          <a:lstStyle/>
+          <a:p>
+            <a:pPr algn="l"/>
+            <a:r>
+              <a:rPr sz="1300" b="1">
+                <a:solidFill>
+                  <a:srgbClr val="F4F7FC"/>
+                </a:solidFill>
+                <a:latin typeface="Aptos"/>
+              </a:rPr>
+              <a:t>Forecast Uncertainty</a:t>
+            </a:r>
+          </a:p>
+        </p:txBody>
+      </p:sp>
+      <p:sp>
+        <p:nvSpPr>
+          <p:cNvPr id="16" name="TextBox 15"/>
+          <p:cNvSpPr txBox="1"/>
+          <p:nvPr/>
+        </p:nvSpPr>
+        <p:spPr>
+          <a:xfrm>
+            <a:off x="841247" y="4023360"/>
+            <a:ext cx="4983480" cy="1207007"/>
+          </a:xfrm>
+          <a:prstGeom prst="rect">
+            <a:avLst/>
+          </a:prstGeom>
+          <a:noFill/>
+        </p:spPr>
+        <p:txBody>
+          <a:bodyPr wrap="square">
+            <a:spAutoFit/>
+          </a:bodyPr>
+          <a:lstStyle/>
+          <a:p>
+            <a:pPr algn="l"/>
+            <a:r>
+              <a:rPr sz="1150" b="0">
+                <a:solidFill>
+                  <a:srgbClr val="B5C4D8"/>
+                </a:solidFill>
+                <a:latin typeface="Aptos"/>
+              </a:rPr>
+              <a:t>• Aggregate uncertainty
+• Selected-SKU inspection
+• Identify weaker-confidence periods</a:t>
+            </a:r>
+          </a:p>
+        </p:txBody>
+      </p:sp>
+      <p:sp>
+        <p:nvSpPr>
+          <p:cNvPr id="17" name="Rounded Rectangle 16"/>
+          <p:cNvSpPr/>
+          <p:nvPr/>
+        </p:nvSpPr>
+        <p:spPr>
+          <a:xfrm>
+            <a:off x="6172200" y="3520440"/>
+            <a:ext cx="5303520" cy="1828800"/>
+          </a:xfrm>
+          <a:prstGeom prst="roundRect">
+            <a:avLst/>
+          </a:prstGeom>
+          <a:solidFill>
+            <a:srgbClr val="1E3454"/>
+          </a:solidFill>
+          <a:ln>
+            <a:solidFill>
+              <a:srgbClr val="1E3454"/>
+            </a:solidFill>
+          </a:ln>
+        </p:spPr>
+        <p:style>
+          <a:lnRef idx="1">
+            <a:schemeClr val="accent1"/>
+          </a:lnRef>
+          <a:fillRef idx="3">
+            <a:schemeClr val="accent1"/>
+          </a:fillRef>
+          <a:effectRef idx="2">
+            <a:schemeClr val="accent1"/>
+          </a:effectRef>
+          <a:fontRef idx="minor">
+            <a:schemeClr val="lt1"/>
+          </a:fontRef>
+        </p:style>
+        <p:txBody>
+          <a:bodyPr rtlCol="0" anchor="ctr"/>
+          <a:lstStyle/>
+          <a:p>
+            <a:pPr algn="ctr"/>
+          </a:p>
+        </p:txBody>
+      </p:sp>
+      <p:sp>
+        <p:nvSpPr>
+          <p:cNvPr id="18" name="Rectangle 17"/>
+          <p:cNvSpPr/>
+          <p:nvPr/>
+        </p:nvSpPr>
+        <p:spPr>
+          <a:xfrm>
+            <a:off x="6172200" y="3520440"/>
+            <a:ext cx="73152" cy="1828800"/>
+          </a:xfrm>
+          <a:prstGeom prst="rect">
+            <a:avLst/>
+          </a:prstGeom>
+          <a:solidFill>
+            <a:srgbClr val="1B9D8C"/>
+          </a:solidFill>
+          <a:ln>
+            <a:noFill/>
+          </a:ln>
+        </p:spPr>
+        <p:style>
+          <a:lnRef idx="1">
+            <a:schemeClr val="accent1"/>
+          </a:lnRef>
+          <a:fillRef idx="3">
+            <a:schemeClr val="accent1"/>
+          </a:fillRef>
+          <a:effectRef idx="2">
+            <a:schemeClr val="accent1"/>
+          </a:effectRef>
+          <a:fontRef idx="minor">
+            <a:schemeClr val="lt1"/>
+          </a:fontRef>
+        </p:style>
+        <p:txBody>
+          <a:bodyPr rtlCol="0" anchor="ctr"/>
+          <a:lstStyle/>
+          <a:p>
+            <a:pPr algn="ctr"/>
+          </a:p>
+        </p:txBody>
+      </p:sp>
+      <p:sp>
+        <p:nvSpPr>
+          <p:cNvPr id="19" name="TextBox 18"/>
+          <p:cNvSpPr txBox="1"/>
+          <p:nvPr/>
+        </p:nvSpPr>
+        <p:spPr>
+          <a:xfrm>
+            <a:off x="6373368" y="3685032"/>
+            <a:ext cx="4983480" cy="256032"/>
+          </a:xfrm>
+          <a:prstGeom prst="rect">
+            <a:avLst/>
+          </a:prstGeom>
+          <a:noFill/>
+        </p:spPr>
+        <p:txBody>
+          <a:bodyPr wrap="square">
+            <a:spAutoFit/>
+          </a:bodyPr>
+          <a:lstStyle/>
+          <a:p>
+            <a:pPr algn="l"/>
+            <a:r>
+              <a:rPr sz="1300" b="1">
+                <a:solidFill>
+                  <a:srgbClr val="F4F7FC"/>
+                </a:solidFill>
+                <a:latin typeface="Aptos"/>
+              </a:rPr>
+              <a:t>Selected SKU Forecast Trend</a:t>
+            </a:r>
+          </a:p>
+        </p:txBody>
+      </p:sp>
+      <p:sp>
+        <p:nvSpPr>
+          <p:cNvPr id="20" name="TextBox 19"/>
+          <p:cNvSpPr txBox="1"/>
+          <p:nvPr/>
+        </p:nvSpPr>
+        <p:spPr>
+          <a:xfrm>
+            <a:off x="6373368" y="4023360"/>
+            <a:ext cx="4983480" cy="1207007"/>
+          </a:xfrm>
+          <a:prstGeom prst="rect">
+            <a:avLst/>
+          </a:prstGeom>
+          <a:noFill/>
+        </p:spPr>
+        <p:txBody>
+          <a:bodyPr wrap="square">
+            <a:spAutoFit/>
+          </a:bodyPr>
+          <a:lstStyle/>
+          <a:p>
+            <a:pPr algn="l"/>
+            <a:r>
+              <a:rPr sz="1150" b="0">
+                <a:solidFill>
+                  <a:srgbClr val="B5C4D8"/>
+                </a:solidFill>
+                <a:latin typeface="Aptos"/>
+              </a:rPr>
+              <a:t>• Appears for a selected SKU
+• Shows forecast trend over time
+• Supports focused decisions</a:t>
+            </a:r>
+          </a:p>
+        </p:txBody>
+      </p:sp>
+    </p:spTree>
+  </p:cSld>
+  <p:clrMapOvr>
+    <a:masterClrMapping/>
+  </p:clrMapOvr>
+</p:sld>
+</file>
+
+<file path=ppt/slides/slide15.xml><?xml version="1.0" encoding="utf-8"?>
+<p:sld xmlns:a="http://schemas.openxmlformats.org/drawingml/2006/main" xmlns:p="http://schemas.openxmlformats.org/presentationml/2006/main" xmlns:r="http://schemas.openxmlformats.org/officeDocument/2006/relationships">
+  <p:cSld>
+    <p:bg>
+      <p:bgPr>
+        <a:solidFill>
+          <a:srgbClr val="0E1D35"/>
+        </a:solidFill>
+        <a:effectLst/>
+      </p:bgPr>
+    </p:bg>
+    <p:spTree>
+      <p:nvGrpSpPr>
+        <p:cNvPr id="1" name=""/>
+        <p:cNvGrpSpPr/>
+        <p:nvPr/>
+      </p:nvGrpSpPr>
+      <p:grpSpPr/>
+      <p:sp>
+        <p:nvSpPr>
+          <p:cNvPr id="2" name="TextBox 1"/>
+          <p:cNvSpPr txBox="1"/>
+          <p:nvPr/>
+        </p:nvSpPr>
+        <p:spPr>
+          <a:xfrm>
+            <a:off x="640080" y="320040"/>
+            <a:ext cx="10972800" cy="365760"/>
+          </a:xfrm>
+          <a:prstGeom prst="rect">
+            <a:avLst/>
+          </a:prstGeom>
+          <a:noFill/>
+        </p:spPr>
+        <p:txBody>
+          <a:bodyPr wrap="square">
+            <a:spAutoFit/>
+          </a:bodyPr>
+          <a:lstStyle/>
+          <a:p>
+            <a:pPr algn="l"/>
+            <a:r>
+              <a:rPr sz="2400" b="1">
+                <a:solidFill>
+                  <a:srgbClr val="F4F7FC"/>
+                </a:solidFill>
+                <a:latin typeface="Aptos"/>
+              </a:rPr>
+              <a:t>Inventory Coverage, Reorder &amp; Markdown Actions</a:t>
+            </a:r>
+          </a:p>
+        </p:txBody>
+      </p:sp>
+      <p:sp>
+        <p:nvSpPr>
+          <p:cNvPr id="3" name="TextBox 2"/>
+          <p:cNvSpPr txBox="1"/>
+          <p:nvPr/>
+        </p:nvSpPr>
+        <p:spPr>
+          <a:xfrm>
+            <a:off x="658368" y="749808"/>
+            <a:ext cx="10972800" cy="274320"/>
+          </a:xfrm>
+          <a:prstGeom prst="rect">
+            <a:avLst/>
+          </a:prstGeom>
+          <a:noFill/>
+        </p:spPr>
+        <p:txBody>
+          <a:bodyPr wrap="square">
+            <a:spAutoFit/>
+          </a:bodyPr>
+          <a:lstStyle/>
+          <a:p>
+            <a:pPr algn="l"/>
+            <a:r>
+              <a:rPr sz="1100" b="0">
+                <a:solidFill>
+                  <a:srgbClr val="B5C4D8"/>
+                </a:solidFill>
+                <a:latin typeface="Aptos"/>
+              </a:rPr>
+              <a:t>Translate demand and inventory signals into operational action lists.</a:t>
+            </a:r>
+          </a:p>
+        </p:txBody>
+      </p:sp>
+      <p:sp>
+        <p:nvSpPr>
+          <p:cNvPr id="4" name="Rectangle 3"/>
+          <p:cNvSpPr/>
+          <p:nvPr/>
+        </p:nvSpPr>
+        <p:spPr>
+          <a:xfrm>
+            <a:off x="658368" y="1078992"/>
+            <a:ext cx="1188720" cy="50292"/>
+          </a:xfrm>
+          <a:prstGeom prst="rect">
+            <a:avLst/>
+          </a:prstGeom>
+          <a:solidFill>
+            <a:srgbClr val="2CBEC9"/>
+          </a:solidFill>
+          <a:ln>
+            <a:noFill/>
+          </a:ln>
+        </p:spPr>
+        <p:style>
+          <a:lnRef idx="1">
+            <a:schemeClr val="accent1"/>
+          </a:lnRef>
+          <a:fillRef idx="3">
+            <a:schemeClr val="accent1"/>
+          </a:fillRef>
+          <a:effectRef idx="2">
+            <a:schemeClr val="accent1"/>
+          </a:effectRef>
+          <a:fontRef idx="minor">
+            <a:schemeClr val="lt1"/>
+          </a:fontRef>
+        </p:style>
+        <p:txBody>
+          <a:bodyPr rtlCol="0" anchor="ctr"/>
+          <a:lstStyle/>
+          <a:p>
+            <a:pPr algn="ctr"/>
+          </a:p>
+        </p:txBody>
+      </p:sp>
+      <p:sp>
+        <p:nvSpPr>
+          <p:cNvPr id="5" name="Rounded Rectangle 4"/>
+          <p:cNvSpPr/>
+          <p:nvPr/>
+        </p:nvSpPr>
+        <p:spPr>
+          <a:xfrm>
+            <a:off x="640080" y="1417320"/>
+            <a:ext cx="3474720" cy="1874519"/>
+          </a:xfrm>
+          <a:prstGeom prst="roundRect">
+            <a:avLst/>
+          </a:prstGeom>
+          <a:solidFill>
+            <a:srgbClr val="1E3454"/>
+          </a:solidFill>
+          <a:ln>
+            <a:solidFill>
+              <a:srgbClr val="1E3454"/>
+            </a:solidFill>
+          </a:ln>
+        </p:spPr>
+        <p:style>
+          <a:lnRef idx="1">
+            <a:schemeClr val="accent1"/>
+          </a:lnRef>
+          <a:fillRef idx="3">
+            <a:schemeClr val="accent1"/>
+          </a:fillRef>
+          <a:effectRef idx="2">
+            <a:schemeClr val="accent1"/>
+          </a:effectRef>
+          <a:fontRef idx="minor">
+            <a:schemeClr val="lt1"/>
+          </a:fontRef>
+        </p:style>
+        <p:txBody>
+          <a:bodyPr rtlCol="0" anchor="ctr"/>
+          <a:lstStyle/>
+          <a:p>
+            <a:pPr algn="ctr"/>
+          </a:p>
+        </p:txBody>
+      </p:sp>
+      <p:sp>
+        <p:nvSpPr>
+          <p:cNvPr id="6" name="Rectangle 5"/>
+          <p:cNvSpPr/>
+          <p:nvPr/>
+        </p:nvSpPr>
+        <p:spPr>
+          <a:xfrm>
+            <a:off x="640080" y="1417320"/>
+            <a:ext cx="73152" cy="1874519"/>
+          </a:xfrm>
+          <a:prstGeom prst="rect">
+            <a:avLst/>
+          </a:prstGeom>
+          <a:solidFill>
+            <a:srgbClr val="2CBEC9"/>
+          </a:solidFill>
+          <a:ln>
+            <a:noFill/>
+          </a:ln>
+        </p:spPr>
+        <p:style>
+          <a:lnRef idx="1">
+            <a:schemeClr val="accent1"/>
+          </a:lnRef>
+          <a:fillRef idx="3">
+            <a:schemeClr val="accent1"/>
+          </a:fillRef>
+          <a:effectRef idx="2">
+            <a:schemeClr val="accent1"/>
+          </a:effectRef>
+          <a:fontRef idx="minor">
+            <a:schemeClr val="lt1"/>
+          </a:fontRef>
+        </p:style>
+        <p:txBody>
+          <a:bodyPr rtlCol="0" anchor="ctr"/>
+          <a:lstStyle/>
+          <a:p>
+            <a:pPr algn="ctr"/>
+          </a:p>
+        </p:txBody>
+      </p:sp>
+      <p:sp>
+        <p:nvSpPr>
+          <p:cNvPr id="7" name="TextBox 6"/>
+          <p:cNvSpPr txBox="1"/>
+          <p:nvPr/>
+        </p:nvSpPr>
+        <p:spPr>
+          <a:xfrm>
+            <a:off x="841247" y="1581912"/>
+            <a:ext cx="3154679" cy="256032"/>
+          </a:xfrm>
+          <a:prstGeom prst="rect">
+            <a:avLst/>
+          </a:prstGeom>
+          <a:noFill/>
+        </p:spPr>
+        <p:txBody>
+          <a:bodyPr wrap="square">
+            <a:spAutoFit/>
+          </a:bodyPr>
+          <a:lstStyle/>
+          <a:p>
+            <a:pPr algn="l"/>
+            <a:r>
+              <a:rPr sz="1300" b="1">
+                <a:solidFill>
+                  <a:srgbClr val="F4F7FC"/>
+                </a:solidFill>
+                <a:latin typeface="Aptos"/>
+              </a:rPr>
+              <a:t>Inventory Coverage</a:t>
+            </a:r>
+          </a:p>
+        </p:txBody>
+      </p:sp>
+      <p:sp>
+        <p:nvSpPr>
+          <p:cNvPr id="8" name="TextBox 7"/>
+          <p:cNvSpPr txBox="1"/>
+          <p:nvPr/>
+        </p:nvSpPr>
+        <p:spPr>
+          <a:xfrm>
+            <a:off x="841247" y="1920240"/>
+            <a:ext cx="3154679" cy="1252727"/>
+          </a:xfrm>
+          <a:prstGeom prst="rect">
+            <a:avLst/>
+          </a:prstGeom>
+          <a:noFill/>
+        </p:spPr>
+        <p:txBody>
+          <a:bodyPr wrap="square">
+            <a:spAutoFit/>
+          </a:bodyPr>
+          <a:lstStyle/>
+          <a:p>
+            <a:pPr algn="l"/>
+            <a:r>
+              <a:rPr sz="1150" b="0">
+                <a:solidFill>
+                  <a:srgbClr val="B5C4D8"/>
+                </a:solidFill>
+                <a:latin typeface="Aptos"/>
+              </a:rPr>
+              <a:t>• 12-week forecast demand
+• Available inventory
+• Coverage indicator
+• Coverage against forecast demand</a:t>
+            </a:r>
+          </a:p>
+        </p:txBody>
+      </p:sp>
+      <p:sp>
+        <p:nvSpPr>
+          <p:cNvPr id="9" name="Rounded Rectangle 8"/>
+          <p:cNvSpPr/>
+          <p:nvPr/>
+        </p:nvSpPr>
+        <p:spPr>
+          <a:xfrm>
+            <a:off x="4343400" y="1417320"/>
+            <a:ext cx="3474720" cy="1874519"/>
+          </a:xfrm>
+          <a:prstGeom prst="roundRect">
+            <a:avLst/>
+          </a:prstGeom>
+          <a:solidFill>
+            <a:srgbClr val="1E3454"/>
+          </a:solidFill>
+          <a:ln>
+            <a:solidFill>
+              <a:srgbClr val="1E3454"/>
+            </a:solidFill>
+          </a:ln>
+        </p:spPr>
+        <p:style>
+          <a:lnRef idx="1">
+            <a:schemeClr val="accent1"/>
+          </a:lnRef>
+          <a:fillRef idx="3">
+            <a:schemeClr val="accent1"/>
+          </a:fillRef>
+          <a:effectRef idx="2">
+            <a:schemeClr val="accent1"/>
+          </a:effectRef>
+          <a:fontRef idx="minor">
+            <a:schemeClr val="lt1"/>
+          </a:fontRef>
+        </p:style>
+        <p:txBody>
+          <a:bodyPr rtlCol="0" anchor="ctr"/>
+          <a:lstStyle/>
+          <a:p>
+            <a:pPr algn="ctr"/>
+          </a:p>
+        </p:txBody>
+      </p:sp>
+      <p:sp>
+        <p:nvSpPr>
+          <p:cNvPr id="10" name="Rectangle 9"/>
+          <p:cNvSpPr/>
+          <p:nvPr/>
+        </p:nvSpPr>
+        <p:spPr>
+          <a:xfrm>
+            <a:off x="4343400" y="1417320"/>
+            <a:ext cx="73152" cy="1874519"/>
+          </a:xfrm>
+          <a:prstGeom prst="rect">
+            <a:avLst/>
+          </a:prstGeom>
+          <a:solidFill>
+            <a:srgbClr val="2B70B8"/>
+          </a:solidFill>
+          <a:ln>
+            <a:noFill/>
+          </a:ln>
+        </p:spPr>
+        <p:style>
+          <a:lnRef idx="1">
+            <a:schemeClr val="accent1"/>
+          </a:lnRef>
+          <a:fillRef idx="3">
+            <a:schemeClr val="accent1"/>
+          </a:fillRef>
+          <a:effectRef idx="2">
+            <a:schemeClr val="accent1"/>
+          </a:effectRef>
+          <a:fontRef idx="minor">
+            <a:schemeClr val="lt1"/>
+          </a:fontRef>
+        </p:style>
+        <p:txBody>
+          <a:bodyPr rtlCol="0" anchor="ctr"/>
+          <a:lstStyle/>
+          <a:p>
+            <a:pPr algn="ctr"/>
+          </a:p>
+        </p:txBody>
+      </p:sp>
+      <p:sp>
+        <p:nvSpPr>
+          <p:cNvPr id="11" name="TextBox 10"/>
+          <p:cNvSpPr txBox="1"/>
+          <p:nvPr/>
+        </p:nvSpPr>
+        <p:spPr>
+          <a:xfrm>
+            <a:off x="4544568" y="1581912"/>
+            <a:ext cx="3154679" cy="256032"/>
+          </a:xfrm>
+          <a:prstGeom prst="rect">
+            <a:avLst/>
+          </a:prstGeom>
+          <a:noFill/>
+        </p:spPr>
+        <p:txBody>
+          <a:bodyPr wrap="square">
+            <a:spAutoFit/>
+          </a:bodyPr>
+          <a:lstStyle/>
+          <a:p>
+            <a:pPr algn="l"/>
+            <a:r>
+              <a:rPr sz="1300" b="1">
+                <a:solidFill>
+                  <a:srgbClr val="F4F7FC"/>
+                </a:solidFill>
+                <a:latin typeface="Aptos"/>
+              </a:rPr>
+              <a:t>Demand vs Available Inventory</a:t>
+            </a:r>
+          </a:p>
+        </p:txBody>
+      </p:sp>
+      <p:sp>
+        <p:nvSpPr>
+          <p:cNvPr id="12" name="TextBox 11"/>
+          <p:cNvSpPr txBox="1"/>
+          <p:nvPr/>
+        </p:nvSpPr>
+        <p:spPr>
+          <a:xfrm>
+            <a:off x="4544568" y="1920240"/>
+            <a:ext cx="3154679" cy="1252727"/>
+          </a:xfrm>
+          <a:prstGeom prst="rect">
+            <a:avLst/>
+          </a:prstGeom>
+          <a:noFill/>
+        </p:spPr>
+        <p:txBody>
+          <a:bodyPr wrap="square">
+            <a:spAutoFit/>
+          </a:bodyPr>
+          <a:lstStyle/>
+          <a:p>
+            <a:pPr algn="l"/>
+            <a:r>
+              <a:rPr sz="1150" b="0">
+                <a:solidFill>
+                  <a:srgbClr val="B5C4D8"/>
+                </a:solidFill>
+                <a:latin typeface="Aptos"/>
+              </a:rPr>
+              <a:t>• Demand and inventory comparison
+• Shortage or excess-stock view
+• Supply prioritization support</a:t>
+            </a:r>
+          </a:p>
+        </p:txBody>
+      </p:sp>
+      <p:sp>
+        <p:nvSpPr>
+          <p:cNvPr id="13" name="Rounded Rectangle 12"/>
+          <p:cNvSpPr/>
+          <p:nvPr/>
+        </p:nvSpPr>
+        <p:spPr>
+          <a:xfrm>
+            <a:off x="8046720" y="1417320"/>
+            <a:ext cx="3474720" cy="1874519"/>
+          </a:xfrm>
+          <a:prstGeom prst="roundRect">
+            <a:avLst/>
+          </a:prstGeom>
+          <a:solidFill>
+            <a:srgbClr val="1E3454"/>
+          </a:solidFill>
+          <a:ln>
+            <a:solidFill>
+              <a:srgbClr val="1E3454"/>
+            </a:solidFill>
+          </a:ln>
+        </p:spPr>
+        <p:style>
+          <a:lnRef idx="1">
+            <a:schemeClr val="accent1"/>
+          </a:lnRef>
+          <a:fillRef idx="3">
+            <a:schemeClr val="accent1"/>
+          </a:fillRef>
+          <a:effectRef idx="2">
+            <a:schemeClr val="accent1"/>
+          </a:effectRef>
+          <a:fontRef idx="minor">
+            <a:schemeClr val="lt1"/>
+          </a:fontRef>
+        </p:style>
+        <p:txBody>
+          <a:bodyPr rtlCol="0" anchor="ctr"/>
+          <a:lstStyle/>
+          <a:p>
+            <a:pPr algn="ctr"/>
+          </a:p>
+        </p:txBody>
+      </p:sp>
+      <p:sp>
+        <p:nvSpPr>
+          <p:cNvPr id="14" name="Rectangle 13"/>
+          <p:cNvSpPr/>
+          <p:nvPr/>
+        </p:nvSpPr>
+        <p:spPr>
+          <a:xfrm>
+            <a:off x="8046720" y="1417320"/>
+            <a:ext cx="73152" cy="1874519"/>
+          </a:xfrm>
+          <a:prstGeom prst="rect">
+            <a:avLst/>
+          </a:prstGeom>
+          <a:solidFill>
+            <a:srgbClr val="1B9D8C"/>
+          </a:solidFill>
+          <a:ln>
+            <a:noFill/>
+          </a:ln>
+        </p:spPr>
+        <p:style>
+          <a:lnRef idx="1">
+            <a:schemeClr val="accent1"/>
+          </a:lnRef>
+          <a:fillRef idx="3">
+            <a:schemeClr val="accent1"/>
+          </a:fillRef>
+          <a:effectRef idx="2">
+            <a:schemeClr val="accent1"/>
+          </a:effectRef>
+          <a:fontRef idx="minor">
+            <a:schemeClr val="lt1"/>
+          </a:fontRef>
+        </p:style>
+        <p:txBody>
+          <a:bodyPr rtlCol="0" anchor="ctr"/>
+          <a:lstStyle/>
+          <a:p>
+            <a:pPr algn="ctr"/>
+          </a:p>
+        </p:txBody>
+      </p:sp>
+      <p:sp>
+        <p:nvSpPr>
+          <p:cNvPr id="15" name="TextBox 14"/>
+          <p:cNvSpPr txBox="1"/>
+          <p:nvPr/>
+        </p:nvSpPr>
+        <p:spPr>
+          <a:xfrm>
+            <a:off x="8247888" y="1581912"/>
+            <a:ext cx="3154679" cy="256032"/>
+          </a:xfrm>
+          <a:prstGeom prst="rect">
+            <a:avLst/>
+          </a:prstGeom>
+          <a:noFill/>
+        </p:spPr>
+        <p:txBody>
+          <a:bodyPr wrap="square">
+            <a:spAutoFit/>
+          </a:bodyPr>
+          <a:lstStyle/>
+          <a:p>
+            <a:pPr algn="l"/>
+            <a:r>
+              <a:rPr sz="1300" b="1">
+                <a:solidFill>
+                  <a:srgbClr val="F4F7FC"/>
+                </a:solidFill>
+                <a:latin typeface="Aptos"/>
+              </a:rPr>
+              <a:t>Prioritized Reorder List</a:t>
+            </a:r>
+          </a:p>
+        </p:txBody>
+      </p:sp>
+      <p:sp>
+        <p:nvSpPr>
+          <p:cNvPr id="16" name="TextBox 15"/>
+          <p:cNvSpPr txBox="1"/>
+          <p:nvPr/>
+        </p:nvSpPr>
+        <p:spPr>
+          <a:xfrm>
+            <a:off x="8247888" y="1920240"/>
+            <a:ext cx="3154679" cy="1252727"/>
+          </a:xfrm>
+          <a:prstGeom prst="rect">
+            <a:avLst/>
+          </a:prstGeom>
+          <a:noFill/>
+        </p:spPr>
+        <p:txBody>
+          <a:bodyPr wrap="square">
+            <a:spAutoFit/>
+          </a:bodyPr>
+          <a:lstStyle/>
+          <a:p>
+            <a:pPr algn="l"/>
+            <a:r>
+              <a:rPr sz="1150" b="0">
+                <a:solidFill>
+                  <a:srgbClr val="B5C4D8"/>
+                </a:solidFill>
+                <a:latin typeface="Aptos"/>
+              </a:rPr>
+              <a:t>• SKUs requiring reorder
+• Urgent inventory attention
+• Replenishment planning support</a:t>
+            </a:r>
+          </a:p>
+        </p:txBody>
+      </p:sp>
+      <p:sp>
+        <p:nvSpPr>
+          <p:cNvPr id="17" name="Rounded Rectangle 16"/>
+          <p:cNvSpPr/>
+          <p:nvPr/>
+        </p:nvSpPr>
+        <p:spPr>
+          <a:xfrm>
+            <a:off x="640080" y="3611880"/>
+            <a:ext cx="5303520" cy="1828800"/>
+          </a:xfrm>
+          <a:prstGeom prst="roundRect">
+            <a:avLst/>
+          </a:prstGeom>
+          <a:solidFill>
+            <a:srgbClr val="1E3454"/>
+          </a:solidFill>
+          <a:ln>
+            <a:solidFill>
+              <a:srgbClr val="1E3454"/>
+            </a:solidFill>
+          </a:ln>
+        </p:spPr>
+        <p:style>
+          <a:lnRef idx="1">
+            <a:schemeClr val="accent1"/>
+          </a:lnRef>
+          <a:fillRef idx="3">
+            <a:schemeClr val="accent1"/>
+          </a:fillRef>
+          <a:effectRef idx="2">
+            <a:schemeClr val="accent1"/>
+          </a:effectRef>
+          <a:fontRef idx="minor">
+            <a:schemeClr val="lt1"/>
+          </a:fontRef>
+        </p:style>
+        <p:txBody>
+          <a:bodyPr rtlCol="0" anchor="ctr"/>
+          <a:lstStyle/>
+          <a:p>
+            <a:pPr algn="ctr"/>
+          </a:p>
+        </p:txBody>
+      </p:sp>
+      <p:sp>
+        <p:nvSpPr>
+          <p:cNvPr id="18" name="Rectangle 17"/>
+          <p:cNvSpPr/>
+          <p:nvPr/>
+        </p:nvSpPr>
+        <p:spPr>
+          <a:xfrm>
+            <a:off x="640080" y="3611880"/>
+            <a:ext cx="73152" cy="1828800"/>
+          </a:xfrm>
+          <a:prstGeom prst="rect">
+            <a:avLst/>
+          </a:prstGeom>
+          <a:solidFill>
+            <a:srgbClr val="F48F2D"/>
+          </a:solidFill>
+          <a:ln>
+            <a:noFill/>
+          </a:ln>
+        </p:spPr>
+        <p:style>
+          <a:lnRef idx="1">
+            <a:schemeClr val="accent1"/>
+          </a:lnRef>
+          <a:fillRef idx="3">
+            <a:schemeClr val="accent1"/>
+          </a:fillRef>
+          <a:effectRef idx="2">
+            <a:schemeClr val="accent1"/>
+          </a:effectRef>
+          <a:fontRef idx="minor">
+            <a:schemeClr val="lt1"/>
+          </a:fontRef>
+        </p:style>
+        <p:txBody>
+          <a:bodyPr rtlCol="0" anchor="ctr"/>
+          <a:lstStyle/>
+          <a:p>
+            <a:pPr algn="ctr"/>
+          </a:p>
+        </p:txBody>
+      </p:sp>
+      <p:sp>
+        <p:nvSpPr>
+          <p:cNvPr id="19" name="TextBox 18"/>
+          <p:cNvSpPr txBox="1"/>
+          <p:nvPr/>
+        </p:nvSpPr>
+        <p:spPr>
+          <a:xfrm>
+            <a:off x="841247" y="3776472"/>
+            <a:ext cx="4983480" cy="256032"/>
+          </a:xfrm>
+          <a:prstGeom prst="rect">
+            <a:avLst/>
+          </a:prstGeom>
+          <a:noFill/>
+        </p:spPr>
+        <p:txBody>
+          <a:bodyPr wrap="square">
+            <a:spAutoFit/>
+          </a:bodyPr>
+          <a:lstStyle/>
+          <a:p>
+            <a:pPr algn="l"/>
+            <a:r>
+              <a:rPr sz="1300" b="1">
+                <a:solidFill>
+                  <a:srgbClr val="F4F7FC"/>
+                </a:solidFill>
+                <a:latin typeface="Aptos"/>
+              </a:rPr>
+              <a:t>Markdown / Clear List</a:t>
+            </a:r>
+          </a:p>
+        </p:txBody>
+      </p:sp>
+      <p:sp>
+        <p:nvSpPr>
+          <p:cNvPr id="20" name="TextBox 19"/>
+          <p:cNvSpPr txBox="1"/>
+          <p:nvPr/>
+        </p:nvSpPr>
+        <p:spPr>
+          <a:xfrm>
+            <a:off x="841247" y="4114800"/>
+            <a:ext cx="4983480" cy="1207007"/>
+          </a:xfrm>
+          <a:prstGeom prst="rect">
+            <a:avLst/>
+          </a:prstGeom>
+          <a:noFill/>
+        </p:spPr>
+        <p:txBody>
+          <a:bodyPr wrap="square">
+            <a:spAutoFit/>
+          </a:bodyPr>
+          <a:lstStyle/>
+          <a:p>
+            <a:pPr algn="l"/>
+            <a:r>
+              <a:rPr sz="1150" b="0">
+                <a:solidFill>
+                  <a:srgbClr val="B5C4D8"/>
+                </a:solidFill>
+                <a:latin typeface="Aptos"/>
+              </a:rPr>
+              <a:t>• Overstock-risk SKUs
+• Markdown or clearance planning
+• Reduce excess inventory exposure</a:t>
+            </a:r>
+          </a:p>
+        </p:txBody>
+      </p:sp>
+      <p:sp>
+        <p:nvSpPr>
+          <p:cNvPr id="21" name="Rounded Rectangle 20"/>
+          <p:cNvSpPr/>
+          <p:nvPr/>
+        </p:nvSpPr>
+        <p:spPr>
+          <a:xfrm>
+            <a:off x="6172200" y="3611880"/>
+            <a:ext cx="5303520" cy="1828800"/>
+          </a:xfrm>
+          <a:prstGeom prst="roundRect">
+            <a:avLst/>
+          </a:prstGeom>
+          <a:solidFill>
+            <a:srgbClr val="1E3454"/>
+          </a:solidFill>
+          <a:ln>
+            <a:solidFill>
+              <a:srgbClr val="1E3454"/>
+            </a:solidFill>
+          </a:ln>
+        </p:spPr>
+        <p:style>
+          <a:lnRef idx="1">
+            <a:schemeClr val="accent1"/>
+          </a:lnRef>
+          <a:fillRef idx="3">
+            <a:schemeClr val="accent1"/>
+          </a:fillRef>
+          <a:effectRef idx="2">
+            <a:schemeClr val="accent1"/>
+          </a:effectRef>
+          <a:fontRef idx="minor">
+            <a:schemeClr val="lt1"/>
+          </a:fontRef>
+        </p:style>
+        <p:txBody>
+          <a:bodyPr rtlCol="0" anchor="ctr"/>
+          <a:lstStyle/>
+          <a:p>
+            <a:pPr algn="ctr"/>
+          </a:p>
+        </p:txBody>
+      </p:sp>
+      <p:sp>
+        <p:nvSpPr>
+          <p:cNvPr id="22" name="Rectangle 21"/>
+          <p:cNvSpPr/>
+          <p:nvPr/>
+        </p:nvSpPr>
+        <p:spPr>
+          <a:xfrm>
+            <a:off x="6172200" y="3611880"/>
+            <a:ext cx="73152" cy="1828800"/>
+          </a:xfrm>
+          <a:prstGeom prst="rect">
+            <a:avLst/>
+          </a:prstGeom>
+          <a:solidFill>
+            <a:srgbClr val="2B70B8"/>
+          </a:solidFill>
+          <a:ln>
+            <a:noFill/>
+          </a:ln>
+        </p:spPr>
+        <p:style>
+          <a:lnRef idx="1">
+            <a:schemeClr val="accent1"/>
+          </a:lnRef>
+          <a:fillRef idx="3">
+            <a:schemeClr val="accent1"/>
+          </a:fillRef>
+          <a:effectRef idx="2">
+            <a:schemeClr val="accent1"/>
+          </a:effectRef>
+          <a:fontRef idx="minor">
+            <a:schemeClr val="lt1"/>
+          </a:fontRef>
+        </p:style>
+        <p:txBody>
+          <a:bodyPr rtlCol="0" anchor="ctr"/>
+          <a:lstStyle/>
+          <a:p>
+            <a:pPr algn="ctr"/>
+          </a:p>
+        </p:txBody>
+      </p:sp>
+      <p:sp>
+        <p:nvSpPr>
+          <p:cNvPr id="23" name="TextBox 22"/>
+          <p:cNvSpPr txBox="1"/>
+          <p:nvPr/>
+        </p:nvSpPr>
+        <p:spPr>
+          <a:xfrm>
+            <a:off x="6373368" y="3776472"/>
+            <a:ext cx="4983480" cy="256032"/>
+          </a:xfrm>
+          <a:prstGeom prst="rect">
+            <a:avLst/>
+          </a:prstGeom>
+          <a:noFill/>
+        </p:spPr>
+        <p:txBody>
+          <a:bodyPr wrap="square">
+            <a:spAutoFit/>
+          </a:bodyPr>
+          <a:lstStyle/>
+          <a:p>
+            <a:pPr algn="l"/>
+            <a:r>
+              <a:rPr sz="1300" b="1">
+                <a:solidFill>
+                  <a:srgbClr val="F4F7FC"/>
+                </a:solidFill>
+                <a:latin typeface="Aptos"/>
+              </a:rPr>
+              <a:t>Inventory Risk Decision Grid</a:t>
+            </a:r>
+          </a:p>
+        </p:txBody>
+      </p:sp>
+      <p:sp>
+        <p:nvSpPr>
+          <p:cNvPr id="24" name="TextBox 23"/>
+          <p:cNvSpPr txBox="1"/>
+          <p:nvPr/>
+        </p:nvSpPr>
+        <p:spPr>
+          <a:xfrm>
+            <a:off x="6373368" y="4114800"/>
+            <a:ext cx="4983480" cy="1207007"/>
+          </a:xfrm>
+          <a:prstGeom prst="rect">
+            <a:avLst/>
+          </a:prstGeom>
+          <a:noFill/>
+        </p:spPr>
+        <p:txBody>
+          <a:bodyPr wrap="square">
+            <a:spAutoFit/>
+          </a:bodyPr>
+          <a:lstStyle/>
+          <a:p>
+            <a:pPr algn="l"/>
+            <a:r>
+              <a:rPr sz="1150" b="0">
+                <a:solidFill>
+                  <a:srgbClr val="B5C4D8"/>
+                </a:solidFill>
+                <a:latin typeface="Aptos"/>
+              </a:rPr>
+              <a:t>• Tabular risk decision view
+• SKU-level operational indicators
+• Easier review and export</a:t>
+            </a:r>
+          </a:p>
+        </p:txBody>
+      </p:sp>
+    </p:spTree>
+  </p:cSld>
+  <p:clrMapOvr>
+    <a:masterClrMapping/>
+  </p:clrMapOvr>
+</p:sld>
+</file>
+
+<file path=ppt/slides/slide16.xml><?xml version="1.0" encoding="utf-8"?>
+<p:sld xmlns:a="http://schemas.openxmlformats.org/drawingml/2006/main" xmlns:p="http://schemas.openxmlformats.org/presentationml/2006/main" xmlns:r="http://schemas.openxmlformats.org/officeDocument/2006/relationships">
+  <p:cSld>
+    <p:bg>
+      <p:bgPr>
+        <a:solidFill>
+          <a:srgbClr val="0E1D35"/>
+        </a:solidFill>
+        <a:effectLst/>
+      </p:bgPr>
+    </p:bg>
+    <p:spTree>
+      <p:nvGrpSpPr>
+        <p:cNvPr id="1" name=""/>
+        <p:cNvGrpSpPr/>
+        <p:nvPr/>
+      </p:nvGrpSpPr>
+      <p:grpSpPr/>
+      <p:sp>
+        <p:nvSpPr>
+          <p:cNvPr id="2" name="TextBox 1"/>
+          <p:cNvSpPr txBox="1"/>
+          <p:nvPr/>
+        </p:nvSpPr>
+        <p:spPr>
+          <a:xfrm>
+            <a:off x="640080" y="320040"/>
+            <a:ext cx="10972800" cy="365760"/>
+          </a:xfrm>
+          <a:prstGeom prst="rect">
+            <a:avLst/>
+          </a:prstGeom>
+          <a:noFill/>
+        </p:spPr>
+        <p:txBody>
+          <a:bodyPr wrap="square">
+            <a:spAutoFit/>
+          </a:bodyPr>
+          <a:lstStyle/>
+          <a:p>
+            <a:pPr algn="l"/>
+            <a:r>
+              <a:rPr sz="2400" b="1">
+                <a:solidFill>
+                  <a:srgbClr val="F4F7FC"/>
+                </a:solidFill>
+                <a:latin typeface="Aptos"/>
+              </a:rPr>
+              <a:t>SKU Drill-Down &amp; Financial Exposure</a:t>
+            </a:r>
+          </a:p>
+        </p:txBody>
+      </p:sp>
+      <p:sp>
+        <p:nvSpPr>
+          <p:cNvPr id="3" name="TextBox 2"/>
+          <p:cNvSpPr txBox="1"/>
+          <p:nvPr/>
+        </p:nvSpPr>
+        <p:spPr>
+          <a:xfrm>
+            <a:off x="658368" y="749808"/>
+            <a:ext cx="10972800" cy="274320"/>
+          </a:xfrm>
+          <a:prstGeom prst="rect">
+            <a:avLst/>
+          </a:prstGeom>
+          <a:noFill/>
+        </p:spPr>
+        <p:txBody>
+          <a:bodyPr wrap="square">
+            <a:spAutoFit/>
+          </a:bodyPr>
+          <a:lstStyle/>
+          <a:p>
+            <a:pPr algn="l"/>
+            <a:r>
+              <a:rPr sz="1100" b="0">
+                <a:solidFill>
+                  <a:srgbClr val="B5C4D8"/>
+                </a:solidFill>
+                <a:latin typeface="Aptos"/>
+              </a:rPr>
+              <a:t>Selecting a SKU changes the detail section to that SKU's operational position.</a:t>
+            </a:r>
+          </a:p>
+        </p:txBody>
+      </p:sp>
+      <p:sp>
+        <p:nvSpPr>
+          <p:cNvPr id="4" name="Rectangle 3"/>
+          <p:cNvSpPr/>
+          <p:nvPr/>
+        </p:nvSpPr>
+        <p:spPr>
+          <a:xfrm>
+            <a:off x="658368" y="1078992"/>
+            <a:ext cx="1188720" cy="50292"/>
+          </a:xfrm>
+          <a:prstGeom prst="rect">
+            <a:avLst/>
+          </a:prstGeom>
+          <a:solidFill>
+            <a:srgbClr val="2CBEC9"/>
+          </a:solidFill>
+          <a:ln>
+            <a:noFill/>
+          </a:ln>
+        </p:spPr>
+        <p:style>
+          <a:lnRef idx="1">
+            <a:schemeClr val="accent1"/>
+          </a:lnRef>
+          <a:fillRef idx="3">
+            <a:schemeClr val="accent1"/>
+          </a:fillRef>
+          <a:effectRef idx="2">
+            <a:schemeClr val="accent1"/>
+          </a:effectRef>
+          <a:fontRef idx="minor">
+            <a:schemeClr val="lt1"/>
+          </a:fontRef>
+        </p:style>
+        <p:txBody>
+          <a:bodyPr rtlCol="0" anchor="ctr"/>
+          <a:lstStyle/>
+          <a:p>
+            <a:pPr algn="ctr"/>
+          </a:p>
+        </p:txBody>
+      </p:sp>
+      <p:sp>
+        <p:nvSpPr>
+          <p:cNvPr id="5" name="Rounded Rectangle 4"/>
+          <p:cNvSpPr/>
+          <p:nvPr/>
+        </p:nvSpPr>
+        <p:spPr>
+          <a:xfrm>
+            <a:off x="640080" y="1417320"/>
+            <a:ext cx="5303520" cy="1874519"/>
+          </a:xfrm>
+          <a:prstGeom prst="roundRect">
+            <a:avLst/>
+          </a:prstGeom>
+          <a:solidFill>
+            <a:srgbClr val="1E3454"/>
+          </a:solidFill>
+          <a:ln>
+            <a:solidFill>
+              <a:srgbClr val="1E3454"/>
+            </a:solidFill>
+          </a:ln>
+        </p:spPr>
+        <p:style>
+          <a:lnRef idx="1">
+            <a:schemeClr val="accent1"/>
+          </a:lnRef>
+          <a:fillRef idx="3">
+            <a:schemeClr val="accent1"/>
+          </a:fillRef>
+          <a:effectRef idx="2">
+            <a:schemeClr val="accent1"/>
+          </a:effectRef>
+          <a:fontRef idx="minor">
+            <a:schemeClr val="lt1"/>
+          </a:fontRef>
+        </p:style>
+        <p:txBody>
+          <a:bodyPr rtlCol="0" anchor="ctr"/>
+          <a:lstStyle/>
+          <a:p>
+            <a:pPr algn="ctr"/>
+          </a:p>
+        </p:txBody>
+      </p:sp>
+      <p:sp>
+        <p:nvSpPr>
+          <p:cNvPr id="6" name="Rectangle 5"/>
+          <p:cNvSpPr/>
+          <p:nvPr/>
+        </p:nvSpPr>
+        <p:spPr>
+          <a:xfrm>
+            <a:off x="640080" y="1417320"/>
+            <a:ext cx="73152" cy="1874519"/>
+          </a:xfrm>
+          <a:prstGeom prst="rect">
+            <a:avLst/>
+          </a:prstGeom>
+          <a:solidFill>
+            <a:srgbClr val="2CBEC9"/>
+          </a:solidFill>
+          <a:ln>
+            <a:noFill/>
+          </a:ln>
+        </p:spPr>
+        <p:style>
+          <a:lnRef idx="1">
+            <a:schemeClr val="accent1"/>
+          </a:lnRef>
+          <a:fillRef idx="3">
+            <a:schemeClr val="accent1"/>
+          </a:fillRef>
+          <a:effectRef idx="2">
+            <a:schemeClr val="accent1"/>
+          </a:effectRef>
+          <a:fontRef idx="minor">
+            <a:schemeClr val="lt1"/>
+          </a:fontRef>
+        </p:style>
+        <p:txBody>
+          <a:bodyPr rtlCol="0" anchor="ctr"/>
+          <a:lstStyle/>
+          <a:p>
+            <a:pPr algn="ctr"/>
+          </a:p>
+        </p:txBody>
+      </p:sp>
+      <p:sp>
+        <p:nvSpPr>
+          <p:cNvPr id="7" name="TextBox 6"/>
+          <p:cNvSpPr txBox="1"/>
+          <p:nvPr/>
+        </p:nvSpPr>
+        <p:spPr>
+          <a:xfrm>
+            <a:off x="841247" y="1581912"/>
+            <a:ext cx="4983480" cy="256032"/>
+          </a:xfrm>
+          <a:prstGeom prst="rect">
+            <a:avLst/>
+          </a:prstGeom>
+          <a:noFill/>
+        </p:spPr>
+        <p:txBody>
+          <a:bodyPr wrap="square">
+            <a:spAutoFit/>
+          </a:bodyPr>
+          <a:lstStyle/>
+          <a:p>
+            <a:pPr algn="l"/>
+            <a:r>
+              <a:rPr sz="1300" b="1">
+                <a:solidFill>
+                  <a:srgbClr val="F4F7FC"/>
+                </a:solidFill>
+                <a:latin typeface="Aptos"/>
+              </a:rPr>
+              <a:t>Selected SKU Details</a:t>
+            </a:r>
+          </a:p>
+        </p:txBody>
+      </p:sp>
+      <p:sp>
+        <p:nvSpPr>
+          <p:cNvPr id="8" name="TextBox 7"/>
+          <p:cNvSpPr txBox="1"/>
+          <p:nvPr/>
+        </p:nvSpPr>
+        <p:spPr>
+          <a:xfrm>
+            <a:off x="841247" y="1920240"/>
+            <a:ext cx="4983480" cy="1252727"/>
+          </a:xfrm>
+          <a:prstGeom prst="rect">
+            <a:avLst/>
+          </a:prstGeom>
+          <a:noFill/>
+        </p:spPr>
+        <p:txBody>
+          <a:bodyPr wrap="square">
+            <a:spAutoFit/>
+          </a:bodyPr>
+          <a:lstStyle/>
+          <a:p>
+            <a:pPr algn="l"/>
+            <a:r>
+              <a:rPr sz="1150" b="0">
+                <a:solidFill>
+                  <a:srgbClr val="B5C4D8"/>
+                </a:solidFill>
+                <a:latin typeface="Aptos"/>
+              </a:rPr>
+              <a:t>• Forecast demand
+• Available inventory
+• 12-week value at risk
+• Risk level and supporting information</a:t>
+            </a:r>
+          </a:p>
+        </p:txBody>
+      </p:sp>
+      <p:sp>
+        <p:nvSpPr>
+          <p:cNvPr id="9" name="Rounded Rectangle 8"/>
+          <p:cNvSpPr/>
+          <p:nvPr/>
+        </p:nvSpPr>
+        <p:spPr>
+          <a:xfrm>
+            <a:off x="6172200" y="1417320"/>
+            <a:ext cx="5303520" cy="1874519"/>
+          </a:xfrm>
+          <a:prstGeom prst="roundRect">
+            <a:avLst/>
+          </a:prstGeom>
+          <a:solidFill>
+            <a:srgbClr val="1E3454"/>
+          </a:solidFill>
+          <a:ln>
+            <a:solidFill>
+              <a:srgbClr val="1E3454"/>
+            </a:solidFill>
+          </a:ln>
+        </p:spPr>
+        <p:style>
+          <a:lnRef idx="1">
+            <a:schemeClr val="accent1"/>
+          </a:lnRef>
+          <a:fillRef idx="3">
+            <a:schemeClr val="accent1"/>
+          </a:fillRef>
+          <a:effectRef idx="2">
+            <a:schemeClr val="accent1"/>
+          </a:effectRef>
+          <a:fontRef idx="minor">
+            <a:schemeClr val="lt1"/>
+          </a:fontRef>
+        </p:style>
+        <p:txBody>
+          <a:bodyPr rtlCol="0" anchor="ctr"/>
+          <a:lstStyle/>
+          <a:p>
+            <a:pPr algn="ctr"/>
+          </a:p>
+        </p:txBody>
+      </p:sp>
+      <p:sp>
+        <p:nvSpPr>
+          <p:cNvPr id="10" name="Rectangle 9"/>
+          <p:cNvSpPr/>
+          <p:nvPr/>
+        </p:nvSpPr>
+        <p:spPr>
+          <a:xfrm>
+            <a:off x="6172200" y="1417320"/>
+            <a:ext cx="73152" cy="1874519"/>
+          </a:xfrm>
+          <a:prstGeom prst="rect">
+            <a:avLst/>
+          </a:prstGeom>
+          <a:solidFill>
+            <a:srgbClr val="F48F2D"/>
+          </a:solidFill>
+          <a:ln>
+            <a:noFill/>
+          </a:ln>
+        </p:spPr>
+        <p:style>
+          <a:lnRef idx="1">
+            <a:schemeClr val="accent1"/>
+          </a:lnRef>
+          <a:fillRef idx="3">
+            <a:schemeClr val="accent1"/>
+          </a:fillRef>
+          <a:effectRef idx="2">
+            <a:schemeClr val="accent1"/>
+          </a:effectRef>
+          <a:fontRef idx="minor">
+            <a:schemeClr val="lt1"/>
+          </a:fontRef>
+        </p:style>
+        <p:txBody>
+          <a:bodyPr rtlCol="0" anchor="ctr"/>
+          <a:lstStyle/>
+          <a:p>
+            <a:pPr algn="ctr"/>
+          </a:p>
+        </p:txBody>
+      </p:sp>
+      <p:sp>
+        <p:nvSpPr>
+          <p:cNvPr id="11" name="TextBox 10"/>
+          <p:cNvSpPr txBox="1"/>
+          <p:nvPr/>
+        </p:nvSpPr>
+        <p:spPr>
+          <a:xfrm>
+            <a:off x="6373368" y="1581912"/>
+            <a:ext cx="4983480" cy="256032"/>
+          </a:xfrm>
+          <a:prstGeom prst="rect">
+            <a:avLst/>
+          </a:prstGeom>
+          <a:noFill/>
+        </p:spPr>
+        <p:txBody>
+          <a:bodyPr wrap="square">
+            <a:spAutoFit/>
+          </a:bodyPr>
+          <a:lstStyle/>
+          <a:p>
+            <a:pPr algn="l"/>
+            <a:r>
+              <a:rPr sz="1300" b="1">
+                <a:solidFill>
+                  <a:srgbClr val="F4F7FC"/>
+                </a:solidFill>
+                <a:latin typeface="Aptos"/>
+              </a:rPr>
+              <a:t>Value at Risk by SKU</a:t>
+            </a:r>
+          </a:p>
+        </p:txBody>
+      </p:sp>
+      <p:sp>
+        <p:nvSpPr>
+          <p:cNvPr id="12" name="TextBox 11"/>
+          <p:cNvSpPr txBox="1"/>
+          <p:nvPr/>
+        </p:nvSpPr>
+        <p:spPr>
+          <a:xfrm>
+            <a:off x="6373368" y="1920240"/>
+            <a:ext cx="4983480" cy="1252727"/>
+          </a:xfrm>
+          <a:prstGeom prst="rect">
+            <a:avLst/>
+          </a:prstGeom>
+          <a:noFill/>
+        </p:spPr>
+        <p:txBody>
+          <a:bodyPr wrap="square">
+            <a:spAutoFit/>
+          </a:bodyPr>
+          <a:lstStyle/>
+          <a:p>
+            <a:pPr algn="l"/>
+            <a:r>
+              <a:rPr sz="1150" b="0">
+                <a:solidFill>
+                  <a:srgbClr val="B5C4D8"/>
+                </a:solidFill>
+                <a:latin typeface="Aptos"/>
+              </a:rPr>
+              <a:t>• Highest financial exposure by SKU
+• Chart for large exposures
+• Finance and operations prioritization</a:t>
+            </a:r>
+          </a:p>
+        </p:txBody>
+      </p:sp>
+      <p:sp>
+        <p:nvSpPr>
+          <p:cNvPr id="13" name="Rounded Rectangle 12"/>
+          <p:cNvSpPr/>
+          <p:nvPr/>
+        </p:nvSpPr>
+        <p:spPr>
+          <a:xfrm>
+            <a:off x="640080" y="3611880"/>
+            <a:ext cx="5303520" cy="1828800"/>
+          </a:xfrm>
+          <a:prstGeom prst="roundRect">
+            <a:avLst/>
+          </a:prstGeom>
+          <a:solidFill>
+            <a:srgbClr val="1E3454"/>
+          </a:solidFill>
+          <a:ln>
+            <a:solidFill>
+              <a:srgbClr val="1E3454"/>
+            </a:solidFill>
+          </a:ln>
+        </p:spPr>
+        <p:style>
+          <a:lnRef idx="1">
+            <a:schemeClr val="accent1"/>
+          </a:lnRef>
+          <a:fillRef idx="3">
+            <a:schemeClr val="accent1"/>
+          </a:fillRef>
+          <a:effectRef idx="2">
+            <a:schemeClr val="accent1"/>
+          </a:effectRef>
+          <a:fontRef idx="minor">
+            <a:schemeClr val="lt1"/>
+          </a:fontRef>
+        </p:style>
+        <p:txBody>
+          <a:bodyPr rtlCol="0" anchor="ctr"/>
+          <a:lstStyle/>
+          <a:p>
+            <a:pPr algn="ctr"/>
+          </a:p>
+        </p:txBody>
+      </p:sp>
+      <p:sp>
+        <p:nvSpPr>
+          <p:cNvPr id="14" name="Rectangle 13"/>
+          <p:cNvSpPr/>
+          <p:nvPr/>
+        </p:nvSpPr>
+        <p:spPr>
+          <a:xfrm>
+            <a:off x="640080" y="3611880"/>
+            <a:ext cx="73152" cy="1828800"/>
+          </a:xfrm>
+          <a:prstGeom prst="rect">
+            <a:avLst/>
+          </a:prstGeom>
+          <a:solidFill>
+            <a:srgbClr val="2B70B8"/>
+          </a:solidFill>
+          <a:ln>
+            <a:noFill/>
+          </a:ln>
+        </p:spPr>
+        <p:style>
+          <a:lnRef idx="1">
+            <a:schemeClr val="accent1"/>
+          </a:lnRef>
+          <a:fillRef idx="3">
+            <a:schemeClr val="accent1"/>
+          </a:fillRef>
+          <a:effectRef idx="2">
+            <a:schemeClr val="accent1"/>
+          </a:effectRef>
+          <a:fontRef idx="minor">
+            <a:schemeClr val="lt1"/>
+          </a:fontRef>
+        </p:style>
+        <p:txBody>
+          <a:bodyPr rtlCol="0" anchor="ctr"/>
+          <a:lstStyle/>
+          <a:p>
+            <a:pPr algn="ctr"/>
+          </a:p>
+        </p:txBody>
+      </p:sp>
+      <p:sp>
+        <p:nvSpPr>
+          <p:cNvPr id="15" name="TextBox 14"/>
+          <p:cNvSpPr txBox="1"/>
+          <p:nvPr/>
+        </p:nvSpPr>
+        <p:spPr>
+          <a:xfrm>
+            <a:off x="841247" y="3776472"/>
+            <a:ext cx="4983480" cy="256032"/>
+          </a:xfrm>
+          <a:prstGeom prst="rect">
+            <a:avLst/>
+          </a:prstGeom>
+          <a:noFill/>
+        </p:spPr>
+        <p:txBody>
+          <a:bodyPr wrap="square">
+            <a:spAutoFit/>
+          </a:bodyPr>
+          <a:lstStyle/>
+          <a:p>
+            <a:pPr algn="l"/>
+            <a:r>
+              <a:rPr sz="1300" b="1">
+                <a:solidFill>
+                  <a:srgbClr val="F4F7FC"/>
+                </a:solidFill>
+                <a:latin typeface="Aptos"/>
+              </a:rPr>
+              <a:t>Risk Interpretation</a:t>
+            </a:r>
+          </a:p>
+        </p:txBody>
+      </p:sp>
+      <p:sp>
+        <p:nvSpPr>
+          <p:cNvPr id="16" name="TextBox 15"/>
+          <p:cNvSpPr txBox="1"/>
+          <p:nvPr/>
+        </p:nvSpPr>
+        <p:spPr>
+          <a:xfrm>
+            <a:off x="841247" y="4114800"/>
+            <a:ext cx="4983480" cy="1207007"/>
+          </a:xfrm>
+          <a:prstGeom prst="rect">
+            <a:avLst/>
+          </a:prstGeom>
+          <a:noFill/>
+        </p:spPr>
+        <p:txBody>
+          <a:bodyPr wrap="square">
+            <a:spAutoFit/>
+          </a:bodyPr>
+          <a:lstStyle/>
+          <a:p>
+            <a:pPr algn="l"/>
+            <a:r>
+              <a:rPr sz="1150" b="0">
+                <a:solidFill>
+                  <a:srgbClr val="B5C4D8"/>
+                </a:solidFill>
+                <a:latin typeface="Aptos"/>
+              </a:rPr>
+              <a:t>Risk uses available inventory and forecast demand. Financial exposure is an estimate and should be validated against lead times, reorder points and supplier constraints.</a:t>
+            </a:r>
+          </a:p>
+        </p:txBody>
+      </p:sp>
+      <p:sp>
+        <p:nvSpPr>
+          <p:cNvPr id="17" name="Rounded Rectangle 16"/>
+          <p:cNvSpPr/>
+          <p:nvPr/>
+        </p:nvSpPr>
+        <p:spPr>
+          <a:xfrm>
+            <a:off x="6172200" y="3611880"/>
+            <a:ext cx="5303520" cy="1828800"/>
+          </a:xfrm>
+          <a:prstGeom prst="roundRect">
+            <a:avLst/>
+          </a:prstGeom>
+          <a:solidFill>
+            <a:srgbClr val="1E3454"/>
+          </a:solidFill>
+          <a:ln>
+            <a:solidFill>
+              <a:srgbClr val="1E3454"/>
+            </a:solidFill>
+          </a:ln>
+        </p:spPr>
+        <p:style>
+          <a:lnRef idx="1">
+            <a:schemeClr val="accent1"/>
+          </a:lnRef>
+          <a:fillRef idx="3">
+            <a:schemeClr val="accent1"/>
+          </a:fillRef>
+          <a:effectRef idx="2">
+            <a:schemeClr val="accent1"/>
+          </a:effectRef>
+          <a:fontRef idx="minor">
+            <a:schemeClr val="lt1"/>
+          </a:fontRef>
+        </p:style>
+        <p:txBody>
+          <a:bodyPr rtlCol="0" anchor="ctr"/>
+          <a:lstStyle/>
+          <a:p>
+            <a:pPr algn="ctr"/>
+          </a:p>
+        </p:txBody>
+      </p:sp>
+      <p:sp>
+        <p:nvSpPr>
+          <p:cNvPr id="18" name="Rectangle 17"/>
+          <p:cNvSpPr/>
+          <p:nvPr/>
+        </p:nvSpPr>
+        <p:spPr>
+          <a:xfrm>
+            <a:off x="6172200" y="3611880"/>
+            <a:ext cx="73152" cy="1828800"/>
+          </a:xfrm>
+          <a:prstGeom prst="rect">
+            <a:avLst/>
+          </a:prstGeom>
+          <a:solidFill>
+            <a:srgbClr val="1B9D8C"/>
+          </a:solidFill>
+          <a:ln>
+            <a:noFill/>
+          </a:ln>
+        </p:spPr>
+        <p:style>
+          <a:lnRef idx="1">
+            <a:schemeClr val="accent1"/>
+          </a:lnRef>
+          <a:fillRef idx="3">
+            <a:schemeClr val="accent1"/>
+          </a:fillRef>
+          <a:effectRef idx="2">
+            <a:schemeClr val="accent1"/>
+          </a:effectRef>
+          <a:fontRef idx="minor">
+            <a:schemeClr val="lt1"/>
+          </a:fontRef>
+        </p:style>
+        <p:txBody>
+          <a:bodyPr rtlCol="0" anchor="ctr"/>
+          <a:lstStyle/>
+          <a:p>
+            <a:pPr algn="ctr"/>
+          </a:p>
+        </p:txBody>
+      </p:sp>
+      <p:sp>
+        <p:nvSpPr>
+          <p:cNvPr id="19" name="TextBox 18"/>
+          <p:cNvSpPr txBox="1"/>
+          <p:nvPr/>
+        </p:nvSpPr>
+        <p:spPr>
+          <a:xfrm>
+            <a:off x="6373368" y="3776472"/>
+            <a:ext cx="4983480" cy="256032"/>
+          </a:xfrm>
+          <a:prstGeom prst="rect">
+            <a:avLst/>
+          </a:prstGeom>
+          <a:noFill/>
+        </p:spPr>
+        <p:txBody>
+          <a:bodyPr wrap="square">
+            <a:spAutoFit/>
+          </a:bodyPr>
+          <a:lstStyle/>
+          <a:p>
+            <a:pPr algn="l"/>
+            <a:r>
+              <a:rPr sz="1300" b="1">
+                <a:solidFill>
+                  <a:srgbClr val="F4F7FC"/>
+                </a:solidFill>
+                <a:latin typeface="Aptos"/>
+              </a:rPr>
+              <a:t>User-Specific Output</a:t>
+            </a:r>
+          </a:p>
+        </p:txBody>
+      </p:sp>
+      <p:sp>
+        <p:nvSpPr>
+          <p:cNvPr id="20" name="TextBox 19"/>
+          <p:cNvSpPr txBox="1"/>
+          <p:nvPr/>
+        </p:nvSpPr>
+        <p:spPr>
+          <a:xfrm>
+            <a:off x="6373368" y="4114800"/>
+            <a:ext cx="4983480" cy="1207007"/>
+          </a:xfrm>
+          <a:prstGeom prst="rect">
+            <a:avLst/>
+          </a:prstGeom>
+          <a:noFill/>
+        </p:spPr>
+        <p:txBody>
+          <a:bodyPr wrap="square">
+            <a:spAutoFit/>
+          </a:bodyPr>
+          <a:lstStyle/>
+          <a:p>
+            <a:pPr algn="l"/>
+            <a:r>
+              <a:rPr sz="1150" b="0">
+                <a:solidFill>
+                  <a:srgbClr val="B5C4D8"/>
+                </a:solidFill>
+                <a:latin typeface="Aptos"/>
+              </a:rPr>
+              <a:t>A compatible uploaded dataset recalculates SKU details, risk counts, forecast totals, inventory indicators and action lists.</a:t>
+            </a:r>
+          </a:p>
+        </p:txBody>
+      </p:sp>
+    </p:spTree>
+  </p:cSld>
+  <p:clrMapOvr>
+    <a:masterClrMapping/>
+  </p:clrMapOvr>
+</p:sld>
+</file>
+
+<file path=ppt/slides/slide17.xml><?xml version="1.0" encoding="utf-8"?>
+<p:sld xmlns:a="http://schemas.openxmlformats.org/drawingml/2006/main" xmlns:p="http://schemas.openxmlformats.org/presentationml/2006/main" xmlns:r="http://schemas.openxmlformats.org/officeDocument/2006/relationships">
+  <p:cSld>
+    <p:bg>
+      <p:bgPr>
+        <a:solidFill>
+          <a:srgbClr val="0E1D35"/>
+        </a:solidFill>
+        <a:effectLst/>
+      </p:bgPr>
+    </p:bg>
+    <p:spTree>
+      <p:nvGrpSpPr>
+        <p:cNvPr id="1" name=""/>
+        <p:cNvGrpSpPr/>
+        <p:nvPr/>
+      </p:nvGrpSpPr>
+      <p:grpSpPr/>
+      <p:sp>
+        <p:nvSpPr>
+          <p:cNvPr id="2" name="TextBox 1"/>
+          <p:cNvSpPr txBox="1"/>
+          <p:nvPr/>
+        </p:nvSpPr>
+        <p:spPr>
+          <a:xfrm>
+            <a:off x="640080" y="320040"/>
+            <a:ext cx="10972800" cy="365760"/>
+          </a:xfrm>
+          <a:prstGeom prst="rect">
+            <a:avLst/>
+          </a:prstGeom>
+          <a:noFill/>
+        </p:spPr>
+        <p:txBody>
+          <a:bodyPr wrap="square">
+            <a:spAutoFit/>
+          </a:bodyPr>
+          <a:lstStyle/>
+          <a:p>
+            <a:pPr algn="l"/>
+            <a:r>
+              <a:rPr sz="2400" b="1">
+                <a:solidFill>
+                  <a:srgbClr val="F4F7FC"/>
+                </a:solidFill>
+                <a:latin typeface="Aptos"/>
+              </a:rPr>
+              <a:t>Model Performance, Executive Summary &amp; Export</a:t>
+            </a:r>
+          </a:p>
+        </p:txBody>
+      </p:sp>
+      <p:sp>
+        <p:nvSpPr>
+          <p:cNvPr id="3" name="TextBox 2"/>
+          <p:cNvSpPr txBox="1"/>
+          <p:nvPr/>
+        </p:nvSpPr>
+        <p:spPr>
+          <a:xfrm>
+            <a:off x="658368" y="749808"/>
+            <a:ext cx="10972800" cy="274320"/>
+          </a:xfrm>
+          <a:prstGeom prst="rect">
+            <a:avLst/>
+          </a:prstGeom>
+          <a:noFill/>
+        </p:spPr>
+        <p:txBody>
+          <a:bodyPr wrap="square">
+            <a:spAutoFit/>
+          </a:bodyPr>
+          <a:lstStyle/>
+          <a:p>
+            <a:pPr algn="l"/>
+            <a:r>
+              <a:rPr sz="1100" b="0">
+                <a:solidFill>
+                  <a:srgbClr val="B5C4D8"/>
+                </a:solidFill>
+                <a:latin typeface="Aptos"/>
+              </a:rPr>
+              <a:t>Connect model results with management interpretation and reusable outputs.</a:t>
+            </a:r>
+          </a:p>
+        </p:txBody>
+      </p:sp>
+      <p:sp>
+        <p:nvSpPr>
+          <p:cNvPr id="4" name="Rectangle 3"/>
+          <p:cNvSpPr/>
+          <p:nvPr/>
+        </p:nvSpPr>
+        <p:spPr>
+          <a:xfrm>
+            <a:off x="658368" y="1078992"/>
+            <a:ext cx="1188720" cy="50292"/>
+          </a:xfrm>
+          <a:prstGeom prst="rect">
+            <a:avLst/>
+          </a:prstGeom>
+          <a:solidFill>
+            <a:srgbClr val="2CBEC9"/>
+          </a:solidFill>
+          <a:ln>
+            <a:noFill/>
+          </a:ln>
+        </p:spPr>
+        <p:style>
+          <a:lnRef idx="1">
+            <a:schemeClr val="accent1"/>
+          </a:lnRef>
+          <a:fillRef idx="3">
+            <a:schemeClr val="accent1"/>
+          </a:fillRef>
+          <a:effectRef idx="2">
+            <a:schemeClr val="accent1"/>
+          </a:effectRef>
+          <a:fontRef idx="minor">
+            <a:schemeClr val="lt1"/>
+          </a:fontRef>
+        </p:style>
+        <p:txBody>
+          <a:bodyPr rtlCol="0" anchor="ctr"/>
+          <a:lstStyle/>
+          <a:p>
+            <a:pPr algn="ctr"/>
+          </a:p>
+        </p:txBody>
+      </p:sp>
+      <p:sp>
+        <p:nvSpPr>
+          <p:cNvPr id="5" name="Rounded Rectangle 4"/>
+          <p:cNvSpPr/>
+          <p:nvPr/>
+        </p:nvSpPr>
+        <p:spPr>
+          <a:xfrm>
+            <a:off x="640080" y="1417320"/>
+            <a:ext cx="3474720" cy="1874519"/>
+          </a:xfrm>
+          <a:prstGeom prst="roundRect">
+            <a:avLst/>
+          </a:prstGeom>
+          <a:solidFill>
+            <a:srgbClr val="1E3454"/>
+          </a:solidFill>
+          <a:ln>
+            <a:solidFill>
+              <a:srgbClr val="1E3454"/>
+            </a:solidFill>
+          </a:ln>
+        </p:spPr>
+        <p:style>
+          <a:lnRef idx="1">
+            <a:schemeClr val="accent1"/>
+          </a:lnRef>
+          <a:fillRef idx="3">
+            <a:schemeClr val="accent1"/>
+          </a:fillRef>
+          <a:effectRef idx="2">
+            <a:schemeClr val="accent1"/>
+          </a:effectRef>
+          <a:fontRef idx="minor">
+            <a:schemeClr val="lt1"/>
+          </a:fontRef>
+        </p:style>
+        <p:txBody>
+          <a:bodyPr rtlCol="0" anchor="ctr"/>
+          <a:lstStyle/>
+          <a:p>
+            <a:pPr algn="ctr"/>
+          </a:p>
+        </p:txBody>
+      </p:sp>
+      <p:sp>
+        <p:nvSpPr>
+          <p:cNvPr id="6" name="Rectangle 5"/>
+          <p:cNvSpPr/>
+          <p:nvPr/>
+        </p:nvSpPr>
+        <p:spPr>
+          <a:xfrm>
+            <a:off x="640080" y="1417320"/>
+            <a:ext cx="73152" cy="1874519"/>
+          </a:xfrm>
+          <a:prstGeom prst="rect">
+            <a:avLst/>
+          </a:prstGeom>
+          <a:solidFill>
+            <a:srgbClr val="2B70B8"/>
+          </a:solidFill>
+          <a:ln>
+            <a:noFill/>
+          </a:ln>
+        </p:spPr>
+        <p:style>
+          <a:lnRef idx="1">
+            <a:schemeClr val="accent1"/>
+          </a:lnRef>
+          <a:fillRef idx="3">
+            <a:schemeClr val="accent1"/>
+          </a:fillRef>
+          <a:effectRef idx="2">
+            <a:schemeClr val="accent1"/>
+          </a:effectRef>
+          <a:fontRef idx="minor">
+            <a:schemeClr val="lt1"/>
+          </a:fontRef>
+        </p:style>
+        <p:txBody>
+          <a:bodyPr rtlCol="0" anchor="ctr"/>
+          <a:lstStyle/>
+          <a:p>
+            <a:pPr algn="ctr"/>
+          </a:p>
+        </p:txBody>
+      </p:sp>
+      <p:sp>
+        <p:nvSpPr>
+          <p:cNvPr id="7" name="TextBox 6"/>
+          <p:cNvSpPr txBox="1"/>
+          <p:nvPr/>
+        </p:nvSpPr>
+        <p:spPr>
+          <a:xfrm>
+            <a:off x="841247" y="1581912"/>
+            <a:ext cx="3154679" cy="256032"/>
+          </a:xfrm>
+          <a:prstGeom prst="rect">
+            <a:avLst/>
+          </a:prstGeom>
+          <a:noFill/>
+        </p:spPr>
+        <p:txBody>
+          <a:bodyPr wrap="square">
+            <a:spAutoFit/>
+          </a:bodyPr>
+          <a:lstStyle/>
+          <a:p>
+            <a:pPr algn="l"/>
+            <a:r>
+              <a:rPr sz="1300" b="1">
+                <a:solidFill>
+                  <a:srgbClr val="F4F7FC"/>
+                </a:solidFill>
+                <a:latin typeface="Aptos"/>
+              </a:rPr>
+              <a:t>Model Performance</a:t>
+            </a:r>
+          </a:p>
+        </p:txBody>
+      </p:sp>
+      <p:sp>
+        <p:nvSpPr>
+          <p:cNvPr id="8" name="TextBox 7"/>
+          <p:cNvSpPr txBox="1"/>
+          <p:nvPr/>
+        </p:nvSpPr>
+        <p:spPr>
+          <a:xfrm>
+            <a:off x="841247" y="1920240"/>
+            <a:ext cx="3154679" cy="1252727"/>
+          </a:xfrm>
+          <a:prstGeom prst="rect">
+            <a:avLst/>
+          </a:prstGeom>
+          <a:noFill/>
+        </p:spPr>
+        <p:txBody>
+          <a:bodyPr wrap="square">
+            <a:spAutoFit/>
+          </a:bodyPr>
+          <a:lstStyle/>
+          <a:p>
+            <a:pPr algn="l"/>
+            <a:r>
+              <a:rPr sz="1150" b="0">
+                <a:solidFill>
+                  <a:srgbClr val="B5C4D8"/>
+                </a:solidFill>
+                <a:latin typeface="Aptos"/>
+              </a:rPr>
+              <a:t>• Final model WAPE
+• Reported performance
+• Relationship between risk KPIs and inventory coverage</a:t>
+            </a:r>
+          </a:p>
+        </p:txBody>
+      </p:sp>
+      <p:sp>
+        <p:nvSpPr>
+          <p:cNvPr id="9" name="Rounded Rectangle 8"/>
+          <p:cNvSpPr/>
+          <p:nvPr/>
+        </p:nvSpPr>
+        <p:spPr>
+          <a:xfrm>
+            <a:off x="4343400" y="1417320"/>
+            <a:ext cx="3474720" cy="1874519"/>
+          </a:xfrm>
+          <a:prstGeom prst="roundRect">
+            <a:avLst/>
+          </a:prstGeom>
+          <a:solidFill>
+            <a:srgbClr val="1E3454"/>
+          </a:solidFill>
+          <a:ln>
+            <a:solidFill>
+              <a:srgbClr val="1E3454"/>
+            </a:solidFill>
+          </a:ln>
+        </p:spPr>
+        <p:style>
+          <a:lnRef idx="1">
+            <a:schemeClr val="accent1"/>
+          </a:lnRef>
+          <a:fillRef idx="3">
+            <a:schemeClr val="accent1"/>
+          </a:fillRef>
+          <a:effectRef idx="2">
+            <a:schemeClr val="accent1"/>
+          </a:effectRef>
+          <a:fontRef idx="minor">
+            <a:schemeClr val="lt1"/>
+          </a:fontRef>
+        </p:style>
+        <p:txBody>
+          <a:bodyPr rtlCol="0" anchor="ctr"/>
+          <a:lstStyle/>
+          <a:p>
+            <a:pPr algn="ctr"/>
+          </a:p>
+        </p:txBody>
+      </p:sp>
+      <p:sp>
+        <p:nvSpPr>
+          <p:cNvPr id="10" name="Rectangle 9"/>
+          <p:cNvSpPr/>
+          <p:nvPr/>
+        </p:nvSpPr>
+        <p:spPr>
+          <a:xfrm>
+            <a:off x="4343400" y="1417320"/>
+            <a:ext cx="73152" cy="1874519"/>
+          </a:xfrm>
+          <a:prstGeom prst="rect">
+            <a:avLst/>
+          </a:prstGeom>
+          <a:solidFill>
+            <a:srgbClr val="2CBEC9"/>
+          </a:solidFill>
+          <a:ln>
+            <a:noFill/>
+          </a:ln>
+        </p:spPr>
+        <p:style>
+          <a:lnRef idx="1">
+            <a:schemeClr val="accent1"/>
+          </a:lnRef>
+          <a:fillRef idx="3">
+            <a:schemeClr val="accent1"/>
+          </a:fillRef>
+          <a:effectRef idx="2">
+            <a:schemeClr val="accent1"/>
+          </a:effectRef>
+          <a:fontRef idx="minor">
+            <a:schemeClr val="lt1"/>
+          </a:fontRef>
+        </p:style>
+        <p:txBody>
+          <a:bodyPr rtlCol="0" anchor="ctr"/>
+          <a:lstStyle/>
+          <a:p>
+            <a:pPr algn="ctr"/>
+          </a:p>
+        </p:txBody>
+      </p:sp>
+      <p:sp>
+        <p:nvSpPr>
+          <p:cNvPr id="11" name="TextBox 10"/>
+          <p:cNvSpPr txBox="1"/>
+          <p:nvPr/>
+        </p:nvSpPr>
+        <p:spPr>
+          <a:xfrm>
+            <a:off x="4544568" y="1581912"/>
+            <a:ext cx="3154679" cy="256032"/>
+          </a:xfrm>
+          <a:prstGeom prst="rect">
+            <a:avLst/>
+          </a:prstGeom>
+          <a:noFill/>
+        </p:spPr>
+        <p:txBody>
+          <a:bodyPr wrap="square">
+            <a:spAutoFit/>
+          </a:bodyPr>
+          <a:lstStyle/>
+          <a:p>
+            <a:pPr algn="l"/>
+            <a:r>
+              <a:rPr sz="1300" b="1">
+                <a:solidFill>
+                  <a:srgbClr val="F4F7FC"/>
+                </a:solidFill>
+                <a:latin typeface="Aptos"/>
+              </a:rPr>
+              <a:t>Model Comparison</a:t>
+            </a:r>
+          </a:p>
+        </p:txBody>
+      </p:sp>
+      <p:sp>
+        <p:nvSpPr>
+          <p:cNvPr id="12" name="TextBox 11"/>
+          <p:cNvSpPr txBox="1"/>
+          <p:nvPr/>
+        </p:nvSpPr>
+        <p:spPr>
+          <a:xfrm>
+            <a:off x="4544568" y="1920240"/>
+            <a:ext cx="3154679" cy="1252727"/>
+          </a:xfrm>
+          <a:prstGeom prst="rect">
+            <a:avLst/>
+          </a:prstGeom>
+          <a:noFill/>
+        </p:spPr>
+        <p:txBody>
+          <a:bodyPr wrap="square">
+            <a:spAutoFit/>
+          </a:bodyPr>
+          <a:lstStyle/>
+          <a:p>
+            <a:pPr algn="l"/>
+            <a:r>
+              <a:rPr sz="1150" b="0">
+                <a:solidFill>
+                  <a:srgbClr val="B5C4D8"/>
+                </a:solidFill>
+                <a:latin typeface="Aptos"/>
+              </a:rPr>
+              <a:t>• Seasonal Naive
+• Random Forest
+• Gradient Boosting
+• Final reported result</a:t>
+            </a:r>
+          </a:p>
+        </p:txBody>
+      </p:sp>
+      <p:sp>
+        <p:nvSpPr>
+          <p:cNvPr id="13" name="Rounded Rectangle 12"/>
+          <p:cNvSpPr/>
+          <p:nvPr/>
+        </p:nvSpPr>
+        <p:spPr>
+          <a:xfrm>
+            <a:off x="8046720" y="1417320"/>
+            <a:ext cx="3474720" cy="1874519"/>
+          </a:xfrm>
+          <a:prstGeom prst="roundRect">
+            <a:avLst/>
+          </a:prstGeom>
+          <a:solidFill>
+            <a:srgbClr val="1E3454"/>
+          </a:solidFill>
+          <a:ln>
+            <a:solidFill>
+              <a:srgbClr val="1E3454"/>
+            </a:solidFill>
+          </a:ln>
+        </p:spPr>
+        <p:style>
+          <a:lnRef idx="1">
+            <a:schemeClr val="accent1"/>
+          </a:lnRef>
+          <a:fillRef idx="3">
+            <a:schemeClr val="accent1"/>
+          </a:fillRef>
+          <a:effectRef idx="2">
+            <a:schemeClr val="accent1"/>
+          </a:effectRef>
+          <a:fontRef idx="minor">
+            <a:schemeClr val="lt1"/>
+          </a:fontRef>
+        </p:style>
+        <p:txBody>
+          <a:bodyPr rtlCol="0" anchor="ctr"/>
+          <a:lstStyle/>
+          <a:p>
+            <a:pPr algn="ctr"/>
+          </a:p>
+        </p:txBody>
+      </p:sp>
+      <p:sp>
+        <p:nvSpPr>
+          <p:cNvPr id="14" name="Rectangle 13"/>
+          <p:cNvSpPr/>
+          <p:nvPr/>
+        </p:nvSpPr>
+        <p:spPr>
+          <a:xfrm>
+            <a:off x="8046720" y="1417320"/>
+            <a:ext cx="73152" cy="1874519"/>
+          </a:xfrm>
+          <a:prstGeom prst="rect">
+            <a:avLst/>
+          </a:prstGeom>
+          <a:solidFill>
+            <a:srgbClr val="1B9D8C"/>
+          </a:solidFill>
+          <a:ln>
+            <a:noFill/>
+          </a:ln>
+        </p:spPr>
+        <p:style>
+          <a:lnRef idx="1">
+            <a:schemeClr val="accent1"/>
+          </a:lnRef>
+          <a:fillRef idx="3">
+            <a:schemeClr val="accent1"/>
+          </a:fillRef>
+          <a:effectRef idx="2">
+            <a:schemeClr val="accent1"/>
+          </a:effectRef>
+          <a:fontRef idx="minor">
+            <a:schemeClr val="lt1"/>
+          </a:fontRef>
+        </p:style>
+        <p:txBody>
+          <a:bodyPr rtlCol="0" anchor="ctr"/>
+          <a:lstStyle/>
+          <a:p>
+            <a:pPr algn="ctr"/>
+          </a:p>
+        </p:txBody>
+      </p:sp>
+      <p:sp>
+        <p:nvSpPr>
+          <p:cNvPr id="15" name="TextBox 14"/>
+          <p:cNvSpPr txBox="1"/>
+          <p:nvPr/>
+        </p:nvSpPr>
+        <p:spPr>
+          <a:xfrm>
+            <a:off x="8247888" y="1581912"/>
+            <a:ext cx="3154679" cy="256032"/>
+          </a:xfrm>
+          <a:prstGeom prst="rect">
+            <a:avLst/>
+          </a:prstGeom>
+          <a:noFill/>
+        </p:spPr>
+        <p:txBody>
+          <a:bodyPr wrap="square">
+            <a:spAutoFit/>
+          </a:bodyPr>
+          <a:lstStyle/>
+          <a:p>
+            <a:pPr algn="l"/>
+            <a:r>
+              <a:rPr sz="1300" b="1">
+                <a:solidFill>
+                  <a:srgbClr val="F4F7FC"/>
+                </a:solidFill>
+                <a:latin typeface="Aptos"/>
+              </a:rPr>
+              <a:t>Executive Summary</a:t>
+            </a:r>
+          </a:p>
+        </p:txBody>
+      </p:sp>
+      <p:sp>
+        <p:nvSpPr>
+          <p:cNvPr id="16" name="TextBox 15"/>
+          <p:cNvSpPr txBox="1"/>
+          <p:nvPr/>
+        </p:nvSpPr>
+        <p:spPr>
+          <a:xfrm>
+            <a:off x="8247888" y="1920240"/>
+            <a:ext cx="3154679" cy="1252727"/>
+          </a:xfrm>
+          <a:prstGeom prst="rect">
+            <a:avLst/>
+          </a:prstGeom>
+          <a:noFill/>
+        </p:spPr>
+        <p:txBody>
+          <a:bodyPr wrap="square">
+            <a:spAutoFit/>
+          </a:bodyPr>
+          <a:lstStyle/>
+          <a:p>
+            <a:pPr algn="l"/>
+            <a:r>
+              <a:rPr sz="1150" b="0">
+                <a:solidFill>
+                  <a:srgbClr val="B5C4D8"/>
+                </a:solidFill>
+                <a:latin typeface="Aptos"/>
+              </a:rPr>
+              <a:t>• SKUs analysed
+• SKUs requiring reorder
+• Focus on highest-risk SKUs</a:t>
+            </a:r>
+          </a:p>
+        </p:txBody>
+      </p:sp>
+      <p:sp>
+        <p:nvSpPr>
+          <p:cNvPr id="17" name="Rounded Rectangle 16"/>
+          <p:cNvSpPr/>
+          <p:nvPr/>
+        </p:nvSpPr>
+        <p:spPr>
+          <a:xfrm>
+            <a:off x="640080" y="3611880"/>
+            <a:ext cx="5303520" cy="1828800"/>
+          </a:xfrm>
+          <a:prstGeom prst="roundRect">
+            <a:avLst/>
+          </a:prstGeom>
+          <a:solidFill>
+            <a:srgbClr val="1E3454"/>
+          </a:solidFill>
+          <a:ln>
+            <a:solidFill>
+              <a:srgbClr val="1E3454"/>
+            </a:solidFill>
+          </a:ln>
+        </p:spPr>
+        <p:style>
+          <a:lnRef idx="1">
+            <a:schemeClr val="accent1"/>
+          </a:lnRef>
+          <a:fillRef idx="3">
+            <a:schemeClr val="accent1"/>
+          </a:fillRef>
+          <a:effectRef idx="2">
+            <a:schemeClr val="accent1"/>
+          </a:effectRef>
+          <a:fontRef idx="minor">
+            <a:schemeClr val="lt1"/>
+          </a:fontRef>
+        </p:style>
+        <p:txBody>
+          <a:bodyPr rtlCol="0" anchor="ctr"/>
+          <a:lstStyle/>
+          <a:p>
+            <a:pPr algn="ctr"/>
+          </a:p>
+        </p:txBody>
+      </p:sp>
+      <p:sp>
+        <p:nvSpPr>
+          <p:cNvPr id="18" name="Rectangle 17"/>
+          <p:cNvSpPr/>
+          <p:nvPr/>
+        </p:nvSpPr>
+        <p:spPr>
+          <a:xfrm>
+            <a:off x="640080" y="3611880"/>
+            <a:ext cx="73152" cy="1828800"/>
+          </a:xfrm>
+          <a:prstGeom prst="rect">
+            <a:avLst/>
+          </a:prstGeom>
+          <a:solidFill>
+            <a:srgbClr val="F48F2D"/>
+          </a:solidFill>
+          <a:ln>
+            <a:noFill/>
+          </a:ln>
+        </p:spPr>
+        <p:style>
+          <a:lnRef idx="1">
+            <a:schemeClr val="accent1"/>
+          </a:lnRef>
+          <a:fillRef idx="3">
+            <a:schemeClr val="accent1"/>
+          </a:fillRef>
+          <a:effectRef idx="2">
+            <a:schemeClr val="accent1"/>
+          </a:effectRef>
+          <a:fontRef idx="minor">
+            <a:schemeClr val="lt1"/>
+          </a:fontRef>
+        </p:style>
+        <p:txBody>
+          <a:bodyPr rtlCol="0" anchor="ctr"/>
+          <a:lstStyle/>
+          <a:p>
+            <a:pPr algn="ctr"/>
+          </a:p>
+        </p:txBody>
+      </p:sp>
+      <p:sp>
+        <p:nvSpPr>
+          <p:cNvPr id="19" name="TextBox 18"/>
+          <p:cNvSpPr txBox="1"/>
+          <p:nvPr/>
+        </p:nvSpPr>
+        <p:spPr>
+          <a:xfrm>
+            <a:off x="841247" y="3776472"/>
+            <a:ext cx="4983480" cy="256032"/>
+          </a:xfrm>
+          <a:prstGeom prst="rect">
+            <a:avLst/>
+          </a:prstGeom>
+          <a:noFill/>
+        </p:spPr>
+        <p:txBody>
+          <a:bodyPr wrap="square">
+            <a:spAutoFit/>
+          </a:bodyPr>
+          <a:lstStyle/>
+          <a:p>
+            <a:pPr algn="l"/>
+            <a:r>
+              <a:rPr sz="1300" b="1">
+                <a:solidFill>
+                  <a:srgbClr val="F4F7FC"/>
+                </a:solidFill>
+                <a:latin typeface="Aptos"/>
+              </a:rPr>
+              <a:t>Download Filtered Risk Data</a:t>
+            </a:r>
+          </a:p>
+        </p:txBody>
+      </p:sp>
+      <p:sp>
+        <p:nvSpPr>
+          <p:cNvPr id="20" name="TextBox 19"/>
+          <p:cNvSpPr txBox="1"/>
+          <p:nvPr/>
+        </p:nvSpPr>
+        <p:spPr>
+          <a:xfrm>
+            <a:off x="841247" y="4114800"/>
+            <a:ext cx="4983480" cy="1207007"/>
+          </a:xfrm>
+          <a:prstGeom prst="rect">
+            <a:avLst/>
+          </a:prstGeom>
+          <a:noFill/>
+        </p:spPr>
+        <p:txBody>
+          <a:bodyPr wrap="square">
+            <a:spAutoFit/>
+          </a:bodyPr>
+          <a:lstStyle/>
+          <a:p>
+            <a:pPr algn="l"/>
+            <a:r>
+              <a:rPr sz="1150" b="0">
+                <a:solidFill>
+                  <a:srgbClr val="B5C4D8"/>
+                </a:solidFill>
+                <a:latin typeface="Aptos"/>
+              </a:rPr>
+              <a:t>Download the currently filtered risk dataset as CSV for review, sharing or downstream use.</a:t>
+            </a:r>
+          </a:p>
+        </p:txBody>
+      </p:sp>
+      <p:sp>
+        <p:nvSpPr>
+          <p:cNvPr id="21" name="Rounded Rectangle 20"/>
+          <p:cNvSpPr/>
+          <p:nvPr/>
+        </p:nvSpPr>
+        <p:spPr>
+          <a:xfrm>
+            <a:off x="6172200" y="3611880"/>
+            <a:ext cx="5303520" cy="1828800"/>
+          </a:xfrm>
+          <a:prstGeom prst="roundRect">
+            <a:avLst/>
+          </a:prstGeom>
+          <a:solidFill>
+            <a:srgbClr val="1E3454"/>
+          </a:solidFill>
+          <a:ln>
+            <a:solidFill>
+              <a:srgbClr val="1E3454"/>
+            </a:solidFill>
+          </a:ln>
+        </p:spPr>
+        <p:style>
+          <a:lnRef idx="1">
+            <a:schemeClr val="accent1"/>
+          </a:lnRef>
+          <a:fillRef idx="3">
+            <a:schemeClr val="accent1"/>
+          </a:fillRef>
+          <a:effectRef idx="2">
+            <a:schemeClr val="accent1"/>
+          </a:effectRef>
+          <a:fontRef idx="minor">
+            <a:schemeClr val="lt1"/>
+          </a:fontRef>
+        </p:style>
+        <p:txBody>
+          <a:bodyPr rtlCol="0" anchor="ctr"/>
+          <a:lstStyle/>
+          <a:p>
+            <a:pPr algn="ctr"/>
+          </a:p>
+        </p:txBody>
+      </p:sp>
+      <p:sp>
+        <p:nvSpPr>
+          <p:cNvPr id="22" name="Rectangle 21"/>
+          <p:cNvSpPr/>
+          <p:nvPr/>
+        </p:nvSpPr>
+        <p:spPr>
+          <a:xfrm>
+            <a:off x="6172200" y="3611880"/>
+            <a:ext cx="73152" cy="1828800"/>
+          </a:xfrm>
+          <a:prstGeom prst="rect">
+            <a:avLst/>
+          </a:prstGeom>
+          <a:solidFill>
+            <a:srgbClr val="2B70B8"/>
+          </a:solidFill>
+          <a:ln>
+            <a:noFill/>
+          </a:ln>
+        </p:spPr>
+        <p:style>
+          <a:lnRef idx="1">
+            <a:schemeClr val="accent1"/>
+          </a:lnRef>
+          <a:fillRef idx="3">
+            <a:schemeClr val="accent1"/>
+          </a:fillRef>
+          <a:effectRef idx="2">
+            <a:schemeClr val="accent1"/>
+          </a:effectRef>
+          <a:fontRef idx="minor">
+            <a:schemeClr val="lt1"/>
+          </a:fontRef>
+        </p:style>
+        <p:txBody>
+          <a:bodyPr rtlCol="0" anchor="ctr"/>
+          <a:lstStyle/>
+          <a:p>
+            <a:pPr algn="ctr"/>
+          </a:p>
+        </p:txBody>
+      </p:sp>
+      <p:sp>
+        <p:nvSpPr>
+          <p:cNvPr id="23" name="TextBox 22"/>
+          <p:cNvSpPr txBox="1"/>
+          <p:nvPr/>
+        </p:nvSpPr>
+        <p:spPr>
+          <a:xfrm>
+            <a:off x="6373368" y="3776472"/>
+            <a:ext cx="4983480" cy="256032"/>
+          </a:xfrm>
+          <a:prstGeom prst="rect">
+            <a:avLst/>
+          </a:prstGeom>
+          <a:noFill/>
+        </p:spPr>
+        <p:txBody>
+          <a:bodyPr wrap="square">
+            <a:spAutoFit/>
+          </a:bodyPr>
+          <a:lstStyle/>
+          <a:p>
+            <a:pPr algn="l"/>
+            <a:r>
+              <a:rPr sz="1300" b="1">
+                <a:solidFill>
+                  <a:srgbClr val="F4F7FC"/>
+                </a:solidFill>
+                <a:latin typeface="Aptos"/>
+              </a:rPr>
+              <a:t>Data Quality &amp; Limitations</a:t>
+            </a:r>
+          </a:p>
+        </p:txBody>
+      </p:sp>
+      <p:sp>
+        <p:nvSpPr>
+          <p:cNvPr id="24" name="TextBox 23"/>
+          <p:cNvSpPr txBox="1"/>
+          <p:nvPr/>
+        </p:nvSpPr>
+        <p:spPr>
+          <a:xfrm>
+            <a:off x="6373368" y="4114800"/>
+            <a:ext cx="4983480" cy="1207007"/>
+          </a:xfrm>
+          <a:prstGeom prst="rect">
+            <a:avLst/>
+          </a:prstGeom>
+          <a:noFill/>
+        </p:spPr>
+        <p:txBody>
+          <a:bodyPr wrap="square">
+            <a:spAutoFit/>
+          </a:bodyPr>
+          <a:lstStyle/>
+          <a:p>
+            <a:pPr algn="l"/>
+            <a:r>
+              <a:rPr sz="1150" b="0">
+                <a:solidFill>
+                  <a:srgbClr val="B5C4D8"/>
+                </a:solidFill>
+                <a:latin typeface="Aptos"/>
+              </a:rPr>
+              <a:t>• Missing-value and duplicate checks
+• SKU/category mapping limitations
+• Available inventory and forecast-based risk
+• Operational validation recommended</a:t>
+            </a:r>
+          </a:p>
+        </p:txBody>
+      </p:sp>
+    </p:spTree>
+  </p:cSld>
+  <p:clrMapOvr>
+    <a:masterClrMapping/>
+  </p:clrMapOvr>
+</p:sld>
+</file>
+
+<file path=ppt/slides/slide18.xml><?xml version="1.0" encoding="utf-8"?>
+<p:sld xmlns:a="http://schemas.openxmlformats.org/drawingml/2006/main" xmlns:p="http://schemas.openxmlformats.org/presentationml/2006/main" xmlns:r="http://schemas.openxmlformats.org/officeDocument/2006/relationships">
+  <p:cSld>
+    <p:bg>
+      <p:bgPr>
+        <a:solidFill>
+          <a:srgbClr val="0E1D35"/>
+        </a:solidFill>
+        <a:effectLst/>
+      </p:bgPr>
+    </p:bg>
+    <p:spTree>
+      <p:nvGrpSpPr>
+        <p:cNvPr id="1" name=""/>
+        <p:cNvGrpSpPr/>
+        <p:nvPr/>
+      </p:nvGrpSpPr>
+      <p:grpSpPr/>
+      <p:sp>
+        <p:nvSpPr>
+          <p:cNvPr id="2" name="TextBox 1"/>
+          <p:cNvSpPr txBox="1"/>
+          <p:nvPr/>
+        </p:nvSpPr>
+        <p:spPr>
+          <a:xfrm>
+            <a:off x="640080" y="320040"/>
+            <a:ext cx="10972800" cy="365760"/>
+          </a:xfrm>
+          <a:prstGeom prst="rect">
+            <a:avLst/>
+          </a:prstGeom>
+          <a:noFill/>
+        </p:spPr>
+        <p:txBody>
+          <a:bodyPr wrap="square">
+            <a:spAutoFit/>
+          </a:bodyPr>
+          <a:lstStyle/>
+          <a:p>
+            <a:pPr algn="l"/>
+            <a:r>
+              <a:rPr sz="2400" b="1">
+                <a:solidFill>
+                  <a:srgbClr val="F4F7FC"/>
+                </a:solidFill>
+                <a:latin typeface="Aptos"/>
+              </a:rPr>
+              <a:t>End-to-End Dashboard Value</a:t>
+            </a:r>
+          </a:p>
+        </p:txBody>
+      </p:sp>
+      <p:sp>
+        <p:nvSpPr>
+          <p:cNvPr id="3" name="TextBox 2"/>
+          <p:cNvSpPr txBox="1"/>
+          <p:nvPr/>
+        </p:nvSpPr>
+        <p:spPr>
+          <a:xfrm>
+            <a:off x="658368" y="749808"/>
+            <a:ext cx="10972800" cy="274320"/>
+          </a:xfrm>
+          <a:prstGeom prst="rect">
+            <a:avLst/>
+          </a:prstGeom>
+          <a:noFill/>
+        </p:spPr>
+        <p:txBody>
+          <a:bodyPr wrap="square">
+            <a:spAutoFit/>
+          </a:bodyPr>
+          <a:lstStyle/>
+          <a:p>
+            <a:pPr algn="l"/>
+            <a:r>
+              <a:rPr sz="1100" b="0">
+                <a:solidFill>
+                  <a:srgbClr val="B5C4D8"/>
+                </a:solidFill>
+                <a:latin typeface="Aptos"/>
+              </a:rPr>
+              <a:t>One workflow from user-uploaded data to actionable inventory intelligence.</a:t>
+            </a:r>
+          </a:p>
+        </p:txBody>
+      </p:sp>
+      <p:sp>
+        <p:nvSpPr>
+          <p:cNvPr id="4" name="Rectangle 3"/>
+          <p:cNvSpPr/>
+          <p:nvPr/>
+        </p:nvSpPr>
+        <p:spPr>
+          <a:xfrm>
+            <a:off x="658368" y="1078992"/>
+            <a:ext cx="1188720" cy="50292"/>
+          </a:xfrm>
+          <a:prstGeom prst="rect">
+            <a:avLst/>
+          </a:prstGeom>
+          <a:solidFill>
+            <a:srgbClr val="2CBEC9"/>
+          </a:solidFill>
+          <a:ln>
+            <a:noFill/>
+          </a:ln>
+        </p:spPr>
+        <p:style>
+          <a:lnRef idx="1">
+            <a:schemeClr val="accent1"/>
+          </a:lnRef>
+          <a:fillRef idx="3">
+            <a:schemeClr val="accent1"/>
+          </a:fillRef>
+          <a:effectRef idx="2">
+            <a:schemeClr val="accent1"/>
+          </a:effectRef>
+          <a:fontRef idx="minor">
+            <a:schemeClr val="lt1"/>
+          </a:fontRef>
+        </p:style>
+        <p:txBody>
+          <a:bodyPr rtlCol="0" anchor="ctr"/>
+          <a:lstStyle/>
+          <a:p>
+            <a:pPr algn="ctr"/>
+          </a:p>
+        </p:txBody>
+      </p:sp>
+      <p:sp>
+        <p:nvSpPr>
+          <p:cNvPr id="5" name="TextBox 4"/>
+          <p:cNvSpPr txBox="1"/>
+          <p:nvPr/>
+        </p:nvSpPr>
+        <p:spPr>
+          <a:xfrm>
+            <a:off x="822960" y="1463040"/>
+            <a:ext cx="10515600" cy="3566160"/>
+          </a:xfrm>
+          <a:prstGeom prst="rect">
+            <a:avLst/>
+          </a:prstGeom>
+          <a:noFill/>
+        </p:spPr>
+        <p:txBody>
+          <a:bodyPr wrap="square">
+            <a:spAutoFit/>
+          </a:bodyPr>
+          <a:lstStyle/>
+          <a:p>
+            <a:pPr>
+              <a:spcAft>
+                <a:spcPts val="700"/>
+              </a:spcAft>
+              <a:defRPr sz="1700">
+                <a:solidFill>
+                  <a:srgbClr val="F4F7FC"/>
+                </a:solidFill>
+                <a:latin typeface="Aptos"/>
+              </a:defRPr>
+            </a:pPr>
+            <a:r>
+              <a:t>Input: User uploads one or multiple compatible CSV files.</a:t>
+            </a:r>
+          </a:p>
+          <a:p>
+            <a:pPr>
+              <a:spcAft>
+                <a:spcPts val="700"/>
+              </a:spcAft>
+              <a:defRPr sz="1700">
+                <a:solidFill>
+                  <a:srgbClr val="F4F7FC"/>
+                </a:solidFill>
+                <a:latin typeface="Aptos"/>
+              </a:defRPr>
+            </a:pPr>
+            <a:r>
+              <a:t>Preparation: Application previews, standardizes and combines the data.</a:t>
+            </a:r>
+          </a:p>
+          <a:p>
+            <a:pPr>
+              <a:spcAft>
+                <a:spcPts val="700"/>
+              </a:spcAft>
+              <a:defRPr sz="1700">
+                <a:solidFill>
+                  <a:srgbClr val="F4F7FC"/>
+                </a:solidFill>
+                <a:latin typeface="Aptos"/>
+              </a:defRPr>
+            </a:pPr>
+            <a:r>
+              <a:t>Analysis: Demand, inventory and SKU-level risk indicators are calculated.</a:t>
+            </a:r>
+          </a:p>
+          <a:p>
+            <a:pPr>
+              <a:spcAft>
+                <a:spcPts val="700"/>
+              </a:spcAft>
+              <a:defRPr sz="1700">
+                <a:solidFill>
+                  <a:srgbClr val="F4F7FC"/>
+                </a:solidFill>
+                <a:latin typeface="Aptos"/>
+              </a:defRPr>
+            </a:pPr>
+            <a:r>
+              <a:t>Monitoring: Filters, trends, uncertainty, coverage and risk charts support exploration.</a:t>
+            </a:r>
+          </a:p>
+          <a:p>
+            <a:pPr>
+              <a:spcAft>
+                <a:spcPts val="700"/>
+              </a:spcAft>
+              <a:defRPr sz="1700">
+                <a:solidFill>
+                  <a:srgbClr val="F4F7FC"/>
+                </a:solidFill>
+                <a:latin typeface="Aptos"/>
+              </a:defRPr>
+            </a:pPr>
+            <a:r>
+              <a:t>Action: Reorder, markdown, decision-grid and value-at-risk views support prioritization.</a:t>
+            </a:r>
+          </a:p>
+          <a:p>
+            <a:pPr>
+              <a:spcAft>
+                <a:spcPts val="700"/>
+              </a:spcAft>
+              <a:defRPr sz="1700">
+                <a:solidFill>
+                  <a:srgbClr val="F4F7FC"/>
+                </a:solidFill>
+                <a:latin typeface="Aptos"/>
+              </a:defRPr>
+            </a:pPr>
+            <a:r>
+              <a:t>Output: Users inspect SKUs, review model performance and download filtered risk data.</a:t>
+            </a:r>
+          </a:p>
+        </p:txBody>
+      </p:sp>
+      <p:sp>
+        <p:nvSpPr>
+          <p:cNvPr id="6" name="TextBox 5"/>
+          <p:cNvSpPr txBox="1"/>
+          <p:nvPr/>
+        </p:nvSpPr>
+        <p:spPr>
+          <a:xfrm>
+            <a:off x="868680" y="5212080"/>
+            <a:ext cx="10332720" cy="457200"/>
+          </a:xfrm>
+          <a:prstGeom prst="rect">
+            <a:avLst/>
+          </a:prstGeom>
+          <a:noFill/>
+        </p:spPr>
+        <p:txBody>
+          <a:bodyPr wrap="square">
+            <a:spAutoFit/>
+          </a:bodyPr>
+          <a:lstStyle/>
+          <a:p>
+            <a:pPr algn="l"/>
+            <a:r>
+              <a:rPr sz="1500" b="1">
+                <a:solidFill>
+                  <a:srgbClr val="2CBEC9"/>
+                </a:solidFill>
+                <a:latin typeface="Aptos"/>
+              </a:rPr>
+              <a:t>Key point: Results are based on the user's uploaded dataset, subject to compatible columns and documented limitations.</a:t>
+            </a:r>
+          </a:p>
+        </p:txBody>
+      </p:sp>
+    </p:spTree>
+  </p:cSld>
+  <p:clrMapOvr>
+    <a:masterClrMapping/>
+  </p:clrMapOvr>
+</p:sld>
+</file>
+
 <file path=ppt/slides/slide2.xml><?xml version="1.0" encoding="utf-8"?>
 <p:sld xmlns:a="http://schemas.openxmlformats.org/drawingml/2006/main" xmlns:p="http://schemas.openxmlformats.org/presentationml/2006/main" xmlns:r="http://schemas.openxmlformats.org/officeDocument/2006/relationships">
   <p:cSld>
@@ -5750,6 +11852,86 @@
                 <a:latin typeface="Aptos"/>
               </a:rPr>
               <a:t>02</a:t>
+            </a:r>
+          </a:p>
+        </p:txBody>
+      </p:sp>
+      <p:sp>
+        <p:nvSpPr>
+          <p:cNvPr id="26" name="Rounded Rectangle 25"/>
+          <p:cNvSpPr/>
+          <p:nvPr/>
+        </p:nvSpPr>
+        <p:spPr>
+          <a:xfrm>
+            <a:off x="6629400" y="5074920"/>
+            <a:ext cx="4800600" cy="658368"/>
+          </a:xfrm>
+          <a:prstGeom prst="roundRect">
+            <a:avLst/>
+          </a:prstGeom>
+          <a:solidFill>
+            <a:srgbClr val="1B9D8C"/>
+          </a:solidFill>
+          <a:ln>
+            <a:solidFill>
+              <a:srgbClr val="1B9D8C"/>
+            </a:solidFill>
+          </a:ln>
+        </p:spPr>
+        <p:style>
+          <a:lnRef idx="1">
+            <a:schemeClr val="accent1"/>
+          </a:lnRef>
+          <a:fillRef idx="3">
+            <a:schemeClr val="accent1"/>
+          </a:fillRef>
+          <a:effectRef idx="2">
+            <a:schemeClr val="accent1"/>
+          </a:effectRef>
+          <a:fontRef idx="minor">
+            <a:schemeClr val="lt1"/>
+          </a:fontRef>
+        </p:style>
+        <p:txBody>
+          <a:bodyPr rtlCol="0" anchor="ctr"/>
+          <a:lstStyle/>
+          <a:p>
+            <a:pPr algn="ctr"/>
+          </a:p>
+        </p:txBody>
+      </p:sp>
+      <p:sp>
+        <p:nvSpPr>
+          <p:cNvPr id="27" name="TextBox 26"/>
+          <p:cNvSpPr txBox="1"/>
+          <p:nvPr/>
+        </p:nvSpPr>
+        <p:spPr>
+          <a:xfrm>
+            <a:off x="6839712" y="5212080"/>
+            <a:ext cx="4389120" cy="320040"/>
+          </a:xfrm>
+          <a:prstGeom prst="rect">
+            <a:avLst/>
+          </a:prstGeom>
+          <a:noFill/>
+        </p:spPr>
+        <p:txBody>
+          <a:bodyPr wrap="square">
+            <a:spAutoFit/>
+          </a:bodyPr>
+          <a:lstStyle/>
+          <a:p>
+            <a:pPr algn="l"/>
+            <a:r>
+              <a:rPr sz="1150" b="1">
+                <a:solidFill>
+                  <a:srgbClr val="F4F7FC"/>
+                </a:solidFill>
+                <a:latin typeface="Aptos"/>
+              </a:rPr>
+              <a:t>Upload your own data → dashboard results update accordingly</a:t>
             </a:r>
           </a:p>
         </p:txBody>
@@ -9930,6 +16112,129 @@
                 <a:latin typeface="Aptos"/>
               </a:rPr>
               <a:t>07</a:t>
+            </a:r>
+          </a:p>
+        </p:txBody>
+      </p:sp>
+      <p:sp>
+        <p:nvSpPr>
+          <p:cNvPr id="13" name="Rounded Rectangle 12"/>
+          <p:cNvSpPr/>
+          <p:nvPr/>
+        </p:nvSpPr>
+        <p:spPr>
+          <a:xfrm>
+            <a:off x="658368" y="5349240"/>
+            <a:ext cx="10835640" cy="713232"/>
+          </a:xfrm>
+          <a:prstGeom prst="roundRect">
+            <a:avLst/>
+          </a:prstGeom>
+          <a:solidFill>
+            <a:srgbClr val="1E3454"/>
+          </a:solidFill>
+          <a:ln>
+            <a:solidFill>
+              <a:srgbClr val="1E3454"/>
+            </a:solidFill>
+          </a:ln>
+        </p:spPr>
+        <p:style>
+          <a:lnRef idx="1">
+            <a:schemeClr val="accent1"/>
+          </a:lnRef>
+          <a:fillRef idx="3">
+            <a:schemeClr val="accent1"/>
+          </a:fillRef>
+          <a:effectRef idx="2">
+            <a:schemeClr val="accent1"/>
+          </a:effectRef>
+          <a:fontRef idx="minor">
+            <a:schemeClr val="lt1"/>
+          </a:fontRef>
+        </p:style>
+        <p:txBody>
+          <a:bodyPr rtlCol="0" anchor="ctr"/>
+          <a:lstStyle/>
+          <a:p>
+            <a:pPr algn="ctr"/>
+          </a:p>
+        </p:txBody>
+      </p:sp>
+      <p:sp>
+        <p:nvSpPr>
+          <p:cNvPr id="14" name="Rectangle 13"/>
+          <p:cNvSpPr/>
+          <p:nvPr/>
+        </p:nvSpPr>
+        <p:spPr>
+          <a:xfrm>
+            <a:off x="658368" y="5349240"/>
+            <a:ext cx="91440" cy="713232"/>
+          </a:xfrm>
+          <a:prstGeom prst="rect">
+            <a:avLst/>
+          </a:prstGeom>
+          <a:solidFill>
+            <a:srgbClr val="2CBEC9"/>
+          </a:solidFill>
+          <a:ln>
+            <a:noFill/>
+          </a:ln>
+        </p:spPr>
+        <p:style>
+          <a:lnRef idx="1">
+            <a:schemeClr val="accent1"/>
+          </a:lnRef>
+          <a:fillRef idx="3">
+            <a:schemeClr val="accent1"/>
+          </a:fillRef>
+          <a:effectRef idx="2">
+            <a:schemeClr val="accent1"/>
+          </a:effectRef>
+          <a:fontRef idx="minor">
+            <a:schemeClr val="lt1"/>
+          </a:fontRef>
+        </p:style>
+        <p:txBody>
+          <a:bodyPr rtlCol="0" anchor="ctr"/>
+          <a:lstStyle/>
+          <a:p>
+            <a:pPr algn="ctr"/>
+          </a:p>
+        </p:txBody>
+      </p:sp>
+      <p:sp>
+        <p:nvSpPr>
+          <p:cNvPr id="15" name="TextBox 14"/>
+          <p:cNvSpPr txBox="1"/>
+          <p:nvPr/>
+        </p:nvSpPr>
+        <p:spPr>
+          <a:xfrm>
+            <a:off x="914400" y="5468112"/>
+            <a:ext cx="10241280" cy="228600"/>
+          </a:xfrm>
+          <a:prstGeom prst="rect">
+            <a:avLst/>
+          </a:prstGeom>
+          <a:noFill/>
+        </p:spPr>
+        <p:txBody>
+          <a:bodyPr wrap="square">
+            <a:spAutoFit/>
+          </a:bodyPr>
+          <a:lstStyle/>
+          <a:p>
+            <a:pPr algn="l"/>
+            <a:r>
+              <a:rPr sz="1250" b="1">
+                <a:solidFill>
+                  <a:srgbClr val="F4F7FC"/>
+                </a:solidFill>
+                <a:latin typeface="Aptos"/>
+              </a:rPr>
+              <a:t>USER-UPLOADED DATA: Any user can upload compatible CSV data; the dashboard recalculates KPIs, forecasts, inventory risk, reorder/markdown lists and SKU insights for that dataset.</a:t>
             </a:r>
           </a:p>
         </p:txBody>
